--- a/clases/clase-16-for-range/Clase 16 - for + range() - Presentación.pptx
+++ b/clases/clase-16-for-range/Clase 16 - for + range() - Presentación.pptx
@@ -17,6 +17,8 @@
     <p:sldId id="262" r:id="rId13"/>
     <p:sldId id="263" r:id="rId14"/>
     <p:sldId id="264" r:id="rId15"/>
+    <p:sldId id="265" r:id="rId16"/>
+    <p:sldId id="266" r:id="rId17"/>
   </p:sldIdLst>
   <p:sldSz cy="6858000" cx="12192000"/>
   <p:notesSz cx="6858000" cy="9144000"/>
@@ -265,7 +267,7 @@
       </p15:sldGuideLst>
     </p:ext>
     <p:ext uri="GoogleSlidesCustomDataVersion2">
-      <go:slidesCustomData xmlns:go="http://customooxmlschemas.google.com/" r:id="rId16" roundtripDataSignature="AMtx7mifmBHZMd6jVJHAk1Oljj/o219rgg=="/>
+      <go:slidesCustomData xmlns:go="http://customooxmlschemas.google.com/" r:id="rId18" roundtripDataSignature="AMtx7mgmY9v2LVIhltTYQQxO/h5cG//r/w=="/>
     </p:ext>
   </p:extLst>
 </p:presentation>
@@ -796,6 +798,204 @@
 </p:notes>
 </file>
 
+<file path=ppt/notesSlides/notesSlide10.xml><?xml version="1.0" encoding="utf-8"?>
+<p:notes xmlns:a="http://schemas.openxmlformats.org/drawingml/2006/main" xmlns:r="http://schemas.openxmlformats.org/officeDocument/2006/relationships" xmlns:mc="http://schemas.openxmlformats.org/markup-compatibility/2006" xmlns:mv="urn:schemas-microsoft-com:mac:vml" xmlns:p="http://schemas.openxmlformats.org/presentationml/2006/main" xmlns:c="http://schemas.openxmlformats.org/drawingml/2006/chart" xmlns:dgm="http://schemas.openxmlformats.org/drawingml/2006/diagram" xmlns:o="urn:schemas-microsoft-com:office:office" xmlns:v="urn:schemas-microsoft-com:vml" xmlns:pvml="urn:schemas-microsoft-com:office:powerpoint" xmlns:com="http://schemas.openxmlformats.org/drawingml/2006/compatibility" xmlns:p14="http://schemas.microsoft.com/office/powerpoint/2010/main" xmlns:p15="http://schemas.microsoft.com/office/powerpoint/2012/main" xmlns:ahyp="http://schemas.microsoft.com/office/drawing/2018/hyperlinkcolor" showMasterPhAnim="0" showMasterSp="0">
+  <p:cSld>
+    <p:spTree>
+      <p:nvGrpSpPr>
+        <p:cNvPr id="207" name="Shape 207"/>
+        <p:cNvGrpSpPr/>
+        <p:nvPr/>
+      </p:nvGrpSpPr>
+      <p:grpSpPr>
+        <a:xfrm>
+          <a:off x="0" y="0"/>
+          <a:ext cx="0" cy="0"/>
+          <a:chOff x="0" y="0"/>
+          <a:chExt cx="0" cy="0"/>
+        </a:xfrm>
+      </p:grpSpPr>
+      <p:sp>
+        <p:nvSpPr>
+          <p:cNvPr id="208" name="Google Shape;208;g3f578362274_0_60:notes"/>
+          <p:cNvSpPr txBox="1"/>
+          <p:nvPr>
+            <p:ph idx="1" type="body"/>
+          </p:nvPr>
+        </p:nvSpPr>
+        <p:spPr>
+          <a:xfrm>
+            <a:off x="685800" y="4343400"/>
+            <a:ext cx="5486400" cy="4114800"/>
+          </a:xfrm>
+          <a:prstGeom prst="rect">
+            <a:avLst/>
+          </a:prstGeom>
+        </p:spPr>
+        <p:txBody>
+          <a:bodyPr anchorCtr="0" anchor="t" bIns="91425" lIns="91425" spcFirstLastPara="1" rIns="91425" wrap="square" tIns="91425">
+            <a:noAutofit/>
+          </a:bodyPr>
+          <a:lstStyle/>
+          <a:p>
+            <a:pPr indent="0" lvl="0" marL="0" rtl="0" algn="l">
+              <a:spcBef>
+                <a:spcPts val="0"/>
+              </a:spcBef>
+              <a:spcAft>
+                <a:spcPts val="0"/>
+              </a:spcAft>
+              <a:buNone/>
+            </a:pPr>
+            <a:r>
+              <a:t/>
+            </a:r>
+            <a:endParaRPr/>
+          </a:p>
+        </p:txBody>
+      </p:sp>
+      <p:sp>
+        <p:nvSpPr>
+          <p:cNvPr id="209" name="Google Shape;209;g3f578362274_0_60:notes"/>
+          <p:cNvSpPr/>
+          <p:nvPr>
+            <p:ph idx="2" type="sldImg"/>
+          </p:nvPr>
+        </p:nvSpPr>
+        <p:spPr>
+          <a:xfrm>
+            <a:off x="1143225" y="685800"/>
+            <a:ext cx="4572300" cy="3429000"/>
+          </a:xfrm>
+          <a:custGeom>
+            <a:rect b="b" l="l" r="r" t="t"/>
+            <a:pathLst>
+              <a:path extrusionOk="0" h="120000" w="120000">
+                <a:moveTo>
+                  <a:pt x="0" y="0"/>
+                </a:moveTo>
+                <a:lnTo>
+                  <a:pt x="120000" y="0"/>
+                </a:lnTo>
+                <a:lnTo>
+                  <a:pt x="120000" y="120000"/>
+                </a:lnTo>
+                <a:lnTo>
+                  <a:pt x="0" y="120000"/>
+                </a:lnTo>
+                <a:close/>
+              </a:path>
+            </a:pathLst>
+          </a:custGeom>
+        </p:spPr>
+      </p:sp>
+    </p:spTree>
+  </p:cSld>
+  <p:clrMapOvr>
+    <a:masterClrMapping/>
+  </p:clrMapOvr>
+</p:notes>
+</file>
+
+<file path=ppt/notesSlides/notesSlide11.xml><?xml version="1.0" encoding="utf-8"?>
+<p:notes xmlns:a="http://schemas.openxmlformats.org/drawingml/2006/main" xmlns:r="http://schemas.openxmlformats.org/officeDocument/2006/relationships" xmlns:mc="http://schemas.openxmlformats.org/markup-compatibility/2006" xmlns:mv="urn:schemas-microsoft-com:mac:vml" xmlns:p="http://schemas.openxmlformats.org/presentationml/2006/main" xmlns:c="http://schemas.openxmlformats.org/drawingml/2006/chart" xmlns:dgm="http://schemas.openxmlformats.org/drawingml/2006/diagram" xmlns:o="urn:schemas-microsoft-com:office:office" xmlns:v="urn:schemas-microsoft-com:vml" xmlns:pvml="urn:schemas-microsoft-com:office:powerpoint" xmlns:com="http://schemas.openxmlformats.org/drawingml/2006/compatibility" xmlns:p14="http://schemas.microsoft.com/office/powerpoint/2010/main" xmlns:p15="http://schemas.microsoft.com/office/powerpoint/2012/main" xmlns:ahyp="http://schemas.microsoft.com/office/drawing/2018/hyperlinkcolor" showMasterPhAnim="0" showMasterSp="0">
+  <p:cSld>
+    <p:spTree>
+      <p:nvGrpSpPr>
+        <p:cNvPr id="217" name="Shape 217"/>
+        <p:cNvGrpSpPr/>
+        <p:nvPr/>
+      </p:nvGrpSpPr>
+      <p:grpSpPr>
+        <a:xfrm>
+          <a:off x="0" y="0"/>
+          <a:ext cx="0" cy="0"/>
+          <a:chOff x="0" y="0"/>
+          <a:chExt cx="0" cy="0"/>
+        </a:xfrm>
+      </p:grpSpPr>
+      <p:sp>
+        <p:nvSpPr>
+          <p:cNvPr id="218" name="Google Shape;218;p7:notes"/>
+          <p:cNvSpPr txBox="1"/>
+          <p:nvPr>
+            <p:ph idx="1" type="body"/>
+          </p:nvPr>
+        </p:nvSpPr>
+        <p:spPr>
+          <a:xfrm>
+            <a:off x="685800" y="4343400"/>
+            <a:ext cx="5486400" cy="4114800"/>
+          </a:xfrm>
+          <a:prstGeom prst="rect">
+            <a:avLst/>
+          </a:prstGeom>
+        </p:spPr>
+        <p:txBody>
+          <a:bodyPr anchorCtr="0" anchor="t" bIns="91425" lIns="91425" spcFirstLastPara="1" rIns="91425" wrap="square" tIns="91425">
+            <a:noAutofit/>
+          </a:bodyPr>
+          <a:lstStyle/>
+          <a:p>
+            <a:pPr indent="0" lvl="0" marL="0" rtl="0" algn="l">
+              <a:spcBef>
+                <a:spcPts val="0"/>
+              </a:spcBef>
+              <a:spcAft>
+                <a:spcPts val="0"/>
+              </a:spcAft>
+              <a:buNone/>
+            </a:pPr>
+            <a:r>
+              <a:t/>
+            </a:r>
+            <a:endParaRPr/>
+          </a:p>
+        </p:txBody>
+      </p:sp>
+      <p:sp>
+        <p:nvSpPr>
+          <p:cNvPr id="219" name="Google Shape;219;p7:notes"/>
+          <p:cNvSpPr/>
+          <p:nvPr>
+            <p:ph idx="2" type="sldImg"/>
+          </p:nvPr>
+        </p:nvSpPr>
+        <p:spPr>
+          <a:xfrm>
+            <a:off x="1143225" y="685800"/>
+            <a:ext cx="4572225" cy="3429000"/>
+          </a:xfrm>
+          <a:custGeom>
+            <a:rect b="b" l="l" r="r" t="t"/>
+            <a:pathLst>
+              <a:path extrusionOk="0" h="120000" w="120000">
+                <a:moveTo>
+                  <a:pt x="0" y="0"/>
+                </a:moveTo>
+                <a:lnTo>
+                  <a:pt x="120000" y="0"/>
+                </a:lnTo>
+                <a:lnTo>
+                  <a:pt x="120000" y="120000"/>
+                </a:lnTo>
+                <a:lnTo>
+                  <a:pt x="0" y="120000"/>
+                </a:lnTo>
+                <a:close/>
+              </a:path>
+            </a:pathLst>
+          </a:custGeom>
+        </p:spPr>
+      </p:sp>
+    </p:spTree>
+  </p:cSld>
+  <p:clrMapOvr>
+    <a:masterClrMapping/>
+  </p:clrMapOvr>
+</p:notes>
+</file>
+
 <file path=ppt/notesSlides/notesSlide2.xml><?xml version="1.0" encoding="utf-8"?>
 <p:notes xmlns:a="http://schemas.openxmlformats.org/drawingml/2006/main" xmlns:r="http://schemas.openxmlformats.org/officeDocument/2006/relationships" xmlns:mc="http://schemas.openxmlformats.org/markup-compatibility/2006" xmlns:mv="urn:schemas-microsoft-com:mac:vml" xmlns:p="http://schemas.openxmlformats.org/presentationml/2006/main" xmlns:c="http://schemas.openxmlformats.org/drawingml/2006/chart" xmlns:dgm="http://schemas.openxmlformats.org/drawingml/2006/diagram" xmlns:o="urn:schemas-microsoft-com:office:office" xmlns:v="urn:schemas-microsoft-com:vml" xmlns:pvml="urn:schemas-microsoft-com:office:powerpoint" xmlns:com="http://schemas.openxmlformats.org/drawingml/2006/compatibility" xmlns:p14="http://schemas.microsoft.com/office/powerpoint/2010/main" xmlns:p15="http://schemas.microsoft.com/office/powerpoint/2012/main" xmlns:ahyp="http://schemas.microsoft.com/office/drawing/2018/hyperlinkcolor" showMasterPhAnim="0" showMasterSp="0">
   <p:cSld>
@@ -1310,7 +1510,7 @@
       </p:grpSpPr>
       <p:sp>
         <p:nvSpPr>
-          <p:cNvPr id="157" name="Google Shape;157;p5:notes"/>
+          <p:cNvPr id="157" name="Google Shape;157;g3f578362274_0_40:notes"/>
           <p:cNvSpPr txBox="1"/>
           <p:nvPr>
             <p:ph idx="1" type="body"/>
@@ -1349,7 +1549,7 @@
       </p:sp>
       <p:sp>
         <p:nvSpPr>
-          <p:cNvPr id="158" name="Google Shape;158;p5:notes"/>
+          <p:cNvPr id="158" name="Google Shape;158;g3f578362274_0_40:notes"/>
           <p:cNvSpPr/>
           <p:nvPr>
             <p:ph idx="2" type="sldImg"/>
@@ -1358,7 +1558,7 @@
         <p:spPr>
           <a:xfrm>
             <a:off x="1143225" y="685800"/>
-            <a:ext cx="4572225" cy="3429000"/>
+            <a:ext cx="4572300" cy="3429000"/>
           </a:xfrm>
           <a:custGeom>
             <a:rect b="b" l="l" r="r" t="t"/>
@@ -1395,7 +1595,7 @@
   <p:cSld>
     <p:spTree>
       <p:nvGrpSpPr>
-        <p:cNvPr id="177" name="Shape 177"/>
+        <p:cNvPr id="173" name="Shape 173"/>
         <p:cNvGrpSpPr/>
         <p:nvPr/>
       </p:nvGrpSpPr>
@@ -1409,7 +1609,7 @@
       </p:grpSpPr>
       <p:sp>
         <p:nvSpPr>
-          <p:cNvPr id="178" name="Google Shape;178;p6:notes"/>
+          <p:cNvPr id="174" name="Google Shape;174;p5:notes"/>
           <p:cNvSpPr txBox="1"/>
           <p:nvPr>
             <p:ph idx="1" type="body"/>
@@ -1448,7 +1648,7 @@
       </p:sp>
       <p:sp>
         <p:nvSpPr>
-          <p:cNvPr id="179" name="Google Shape;179;p6:notes"/>
+          <p:cNvPr id="175" name="Google Shape;175;p5:notes"/>
           <p:cNvSpPr/>
           <p:nvPr>
             <p:ph idx="2" type="sldImg"/>
@@ -1457,7 +1657,7 @@
         <p:spPr>
           <a:xfrm>
             <a:off x="1143225" y="685800"/>
-            <a:ext cx="4572225" cy="3429000"/>
+            <a:ext cx="4572300" cy="3429000"/>
           </a:xfrm>
           <a:custGeom>
             <a:rect b="b" l="l" r="r" t="t"/>
@@ -1494,7 +1694,7 @@
   <p:cSld>
     <p:spTree>
       <p:nvGrpSpPr>
-        <p:cNvPr id="190" name="Shape 190"/>
+        <p:cNvPr id="194" name="Shape 194"/>
         <p:cNvGrpSpPr/>
         <p:nvPr/>
       </p:nvGrpSpPr>
@@ -1508,7 +1708,7 @@
       </p:grpSpPr>
       <p:sp>
         <p:nvSpPr>
-          <p:cNvPr id="191" name="Google Shape;191;p7:notes"/>
+          <p:cNvPr id="195" name="Google Shape;195;p6:notes"/>
           <p:cNvSpPr txBox="1"/>
           <p:nvPr>
             <p:ph idx="1" type="body"/>
@@ -1547,7 +1747,7 @@
       </p:sp>
       <p:sp>
         <p:nvSpPr>
-          <p:cNvPr id="192" name="Google Shape;192;p7:notes"/>
+          <p:cNvPr id="196" name="Google Shape;196;p6:notes"/>
           <p:cNvSpPr/>
           <p:nvPr>
             <p:ph idx="2" type="sldImg"/>
@@ -11761,6 +11961,1035 @@
 </p:sld>
 </file>
 
+<file path=ppt/slides/slide10.xml><?xml version="1.0" encoding="utf-8"?>
+<p:sld xmlns:a="http://schemas.openxmlformats.org/drawingml/2006/main" xmlns:r="http://schemas.openxmlformats.org/officeDocument/2006/relationships" xmlns:mc="http://schemas.openxmlformats.org/markup-compatibility/2006" xmlns:mv="urn:schemas-microsoft-com:mac:vml" xmlns:p="http://schemas.openxmlformats.org/presentationml/2006/main" xmlns:c="http://schemas.openxmlformats.org/drawingml/2006/chart" xmlns:dgm="http://schemas.openxmlformats.org/drawingml/2006/diagram" xmlns:o="urn:schemas-microsoft-com:office:office" xmlns:v="urn:schemas-microsoft-com:vml" xmlns:pvml="urn:schemas-microsoft-com:office:powerpoint" xmlns:com="http://schemas.openxmlformats.org/drawingml/2006/compatibility" xmlns:p14="http://schemas.microsoft.com/office/powerpoint/2010/main" xmlns:p15="http://schemas.microsoft.com/office/powerpoint/2012/main" xmlns:ahyp="http://schemas.microsoft.com/office/drawing/2018/hyperlinkcolor">
+  <p:cSld>
+    <p:spTree>
+      <p:nvGrpSpPr>
+        <p:cNvPr id="210" name="Shape 210"/>
+        <p:cNvGrpSpPr/>
+        <p:nvPr/>
+      </p:nvGrpSpPr>
+      <p:grpSpPr>
+        <a:xfrm>
+          <a:off x="0" y="0"/>
+          <a:ext cx="0" cy="0"/>
+          <a:chOff x="0" y="0"/>
+          <a:chExt cx="0" cy="0"/>
+        </a:xfrm>
+      </p:grpSpPr>
+      <p:sp>
+        <p:nvSpPr>
+          <p:cNvPr id="211" name="Google Shape;211;g3f578362274_0_60"/>
+          <p:cNvSpPr/>
+          <p:nvPr/>
+        </p:nvSpPr>
+        <p:spPr>
+          <a:xfrm>
+            <a:off x="0" y="0"/>
+            <a:ext cx="12191700" cy="6858000"/>
+          </a:xfrm>
+          <a:prstGeom prst="rect">
+            <a:avLst/>
+          </a:prstGeom>
+          <a:solidFill>
+            <a:srgbClr val="1A1A2E"/>
+          </a:solidFill>
+          <a:ln>
+            <a:noFill/>
+          </a:ln>
+        </p:spPr>
+        <p:txBody>
+          <a:bodyPr anchorCtr="0" anchor="ctr" bIns="45700" lIns="91425" spcFirstLastPara="1" rIns="91425" wrap="square" tIns="45700">
+            <a:noAutofit/>
+          </a:bodyPr>
+          <a:lstStyle/>
+          <a:p>
+            <a:pPr indent="0" lvl="0" marL="0" marR="0" rtl="0" algn="ctr">
+              <a:spcBef>
+                <a:spcPts val="0"/>
+              </a:spcBef>
+              <a:spcAft>
+                <a:spcPts val="0"/>
+              </a:spcAft>
+              <a:buNone/>
+            </a:pPr>
+            <a:r>
+              <a:t/>
+            </a:r>
+            <a:endParaRPr sz="1800">
+              <a:solidFill>
+                <a:schemeClr val="lt1"/>
+              </a:solidFill>
+              <a:latin typeface="Calibri"/>
+              <a:ea typeface="Calibri"/>
+              <a:cs typeface="Calibri"/>
+              <a:sym typeface="Calibri"/>
+            </a:endParaRPr>
+          </a:p>
+        </p:txBody>
+      </p:sp>
+      <p:sp>
+        <p:nvSpPr>
+          <p:cNvPr id="212" name="Google Shape;212;g3f578362274_0_60"/>
+          <p:cNvSpPr txBox="1"/>
+          <p:nvPr/>
+        </p:nvSpPr>
+        <p:spPr>
+          <a:xfrm>
+            <a:off x="548640" y="411480"/>
+            <a:ext cx="11094300" cy="646500"/>
+          </a:xfrm>
+          <a:prstGeom prst="rect">
+            <a:avLst/>
+          </a:prstGeom>
+          <a:noFill/>
+          <a:ln>
+            <a:noFill/>
+          </a:ln>
+        </p:spPr>
+        <p:txBody>
+          <a:bodyPr anchorCtr="0" anchor="t" bIns="45700" lIns="91425" spcFirstLastPara="1" rIns="91425" wrap="square" tIns="45700">
+            <a:spAutoFit/>
+          </a:bodyPr>
+          <a:lstStyle/>
+          <a:p>
+            <a:pPr indent="0" lvl="0" marL="0" marR="0" rtl="0" algn="l">
+              <a:spcBef>
+                <a:spcPts val="0"/>
+              </a:spcBef>
+              <a:spcAft>
+                <a:spcPts val="0"/>
+              </a:spcAft>
+              <a:buNone/>
+            </a:pPr>
+            <a:r>
+              <a:rPr b="1" lang="en-US" sz="3600">
+                <a:solidFill>
+                  <a:srgbClr val="FFFFFF"/>
+                </a:solidFill>
+                <a:latin typeface="Calibri"/>
+                <a:ea typeface="Calibri"/>
+                <a:cs typeface="Calibri"/>
+                <a:sym typeface="Calibri"/>
+              </a:rPr>
+              <a:t>¿Dónde podría estudiar?</a:t>
+            </a:r>
+            <a:endParaRPr/>
+          </a:p>
+        </p:txBody>
+      </p:sp>
+      <p:sp>
+        <p:nvSpPr>
+          <p:cNvPr id="213" name="Google Shape;213;g3f578362274_0_60"/>
+          <p:cNvSpPr/>
+          <p:nvPr/>
+        </p:nvSpPr>
+        <p:spPr>
+          <a:xfrm>
+            <a:off x="548680" y="1051552"/>
+            <a:ext cx="4768500" cy="43800"/>
+          </a:xfrm>
+          <a:prstGeom prst="rect">
+            <a:avLst/>
+          </a:prstGeom>
+          <a:solidFill>
+            <a:srgbClr val="F5A623"/>
+          </a:solidFill>
+          <a:ln>
+            <a:noFill/>
+          </a:ln>
+        </p:spPr>
+        <p:txBody>
+          <a:bodyPr anchorCtr="0" anchor="ctr" bIns="45700" lIns="91425" spcFirstLastPara="1" rIns="91425" wrap="square" tIns="45700">
+            <a:noAutofit/>
+          </a:bodyPr>
+          <a:lstStyle/>
+          <a:p>
+            <a:pPr indent="0" lvl="0" marL="0" marR="0" rtl="0" algn="ctr">
+              <a:spcBef>
+                <a:spcPts val="0"/>
+              </a:spcBef>
+              <a:spcAft>
+                <a:spcPts val="0"/>
+              </a:spcAft>
+              <a:buNone/>
+            </a:pPr>
+            <a:r>
+              <a:t/>
+            </a:r>
+            <a:endParaRPr sz="1800">
+              <a:solidFill>
+                <a:schemeClr val="lt1"/>
+              </a:solidFill>
+              <a:latin typeface="Calibri"/>
+              <a:ea typeface="Calibri"/>
+              <a:cs typeface="Calibri"/>
+              <a:sym typeface="Calibri"/>
+            </a:endParaRPr>
+          </a:p>
+        </p:txBody>
+      </p:sp>
+      <p:pic>
+        <p:nvPicPr>
+          <p:cNvPr id="214" name="Google Shape;214;g3f578362274_0_60">
+            <a:hlinkClick r:id="rId3"/>
+          </p:cNvPr>
+          <p:cNvPicPr preferRelativeResize="0"/>
+          <p:nvPr/>
+        </p:nvPicPr>
+        <p:blipFill>
+          <a:blip r:embed="rId4">
+            <a:alphaModFix/>
+          </a:blip>
+          <a:stretch>
+            <a:fillRect/>
+          </a:stretch>
+        </p:blipFill>
+        <p:spPr>
+          <a:xfrm>
+            <a:off x="830025" y="1394450"/>
+            <a:ext cx="10531951" cy="2266150"/>
+          </a:xfrm>
+          <a:prstGeom prst="rect">
+            <a:avLst/>
+          </a:prstGeom>
+          <a:noFill/>
+          <a:ln>
+            <a:noFill/>
+          </a:ln>
+        </p:spPr>
+      </p:pic>
+      <p:pic>
+        <p:nvPicPr>
+          <p:cNvPr id="215" name="Google Shape;215;g3f578362274_0_60"/>
+          <p:cNvPicPr preferRelativeResize="0"/>
+          <p:nvPr/>
+        </p:nvPicPr>
+        <p:blipFill>
+          <a:blip r:embed="rId5">
+            <a:alphaModFix/>
+          </a:blip>
+          <a:stretch>
+            <a:fillRect/>
+          </a:stretch>
+        </p:blipFill>
+        <p:spPr>
+          <a:xfrm>
+            <a:off x="829825" y="4129775"/>
+            <a:ext cx="10531950" cy="2068445"/>
+          </a:xfrm>
+          <a:prstGeom prst="rect">
+            <a:avLst/>
+          </a:prstGeom>
+          <a:noFill/>
+          <a:ln>
+            <a:noFill/>
+          </a:ln>
+        </p:spPr>
+      </p:pic>
+      <p:sp>
+        <p:nvSpPr>
+          <p:cNvPr id="216" name="Google Shape;216;g3f578362274_0_60"/>
+          <p:cNvSpPr txBox="1"/>
+          <p:nvPr/>
+        </p:nvSpPr>
+        <p:spPr>
+          <a:xfrm>
+            <a:off x="830025" y="4398450"/>
+            <a:ext cx="9747900" cy="1293000"/>
+          </a:xfrm>
+          <a:prstGeom prst="rect">
+            <a:avLst/>
+          </a:prstGeom>
+          <a:noFill/>
+          <a:ln>
+            <a:noFill/>
+          </a:ln>
+        </p:spPr>
+        <p:txBody>
+          <a:bodyPr anchorCtr="0" anchor="t" bIns="91425" lIns="91425" spcFirstLastPara="1" rIns="91425" wrap="square" tIns="91425">
+            <a:spAutoFit/>
+          </a:bodyPr>
+          <a:lstStyle/>
+          <a:p>
+            <a:pPr indent="0" lvl="0" marL="0" rtl="0" algn="r">
+              <a:spcBef>
+                <a:spcPts val="0"/>
+              </a:spcBef>
+              <a:spcAft>
+                <a:spcPts val="0"/>
+              </a:spcAft>
+              <a:buNone/>
+            </a:pPr>
+            <a:r>
+              <a:rPr b="1" lang="en-US" sz="3600">
+                <a:solidFill>
+                  <a:schemeClr val="lt1"/>
+                </a:solidFill>
+                <a:uFill>
+                  <a:noFill/>
+                </a:uFill>
+                <a:hlinkClick r:id="rId6">
+                  <a:extLst>
+                    <a:ext uri="{A12FA001-AC4F-418D-AE19-62706E023703}">
+                      <ahyp:hlinkClr val="tx"/>
+                    </a:ext>
+                  </a:extLst>
+                </a:hlinkClick>
+              </a:rPr>
+              <a:t>https://admision.uc.cl/carreras/licenciatura-en-ingenieria-en-ciencia-de-datos/</a:t>
+            </a:r>
+            <a:r>
+              <a:rPr b="1" lang="en-US" sz="3600">
+                <a:solidFill>
+                  <a:schemeClr val="lt1"/>
+                </a:solidFill>
+              </a:rPr>
+              <a:t> </a:t>
+            </a:r>
+            <a:endParaRPr>
+              <a:solidFill>
+                <a:schemeClr val="lt1"/>
+              </a:solidFill>
+            </a:endParaRPr>
+          </a:p>
+        </p:txBody>
+      </p:sp>
+    </p:spTree>
+  </p:cSld>
+  <p:clrMapOvr>
+    <a:masterClrMapping/>
+  </p:clrMapOvr>
+</p:sld>
+</file>
+
+<file path=ppt/slides/slide11.xml><?xml version="1.0" encoding="utf-8"?>
+<p:sld xmlns:a="http://schemas.openxmlformats.org/drawingml/2006/main" xmlns:r="http://schemas.openxmlformats.org/officeDocument/2006/relationships" xmlns:mc="http://schemas.openxmlformats.org/markup-compatibility/2006" xmlns:mv="urn:schemas-microsoft-com:mac:vml" xmlns:p="http://schemas.openxmlformats.org/presentationml/2006/main" xmlns:c="http://schemas.openxmlformats.org/drawingml/2006/chart" xmlns:dgm="http://schemas.openxmlformats.org/drawingml/2006/diagram" xmlns:o="urn:schemas-microsoft-com:office:office" xmlns:v="urn:schemas-microsoft-com:vml" xmlns:pvml="urn:schemas-microsoft-com:office:powerpoint" xmlns:com="http://schemas.openxmlformats.org/drawingml/2006/compatibility" xmlns:p14="http://schemas.microsoft.com/office/powerpoint/2010/main" xmlns:p15="http://schemas.microsoft.com/office/powerpoint/2012/main" xmlns:ahyp="http://schemas.microsoft.com/office/drawing/2018/hyperlinkcolor">
+  <p:cSld>
+    <p:spTree>
+      <p:nvGrpSpPr>
+        <p:cNvPr id="220" name="Shape 220"/>
+        <p:cNvGrpSpPr/>
+        <p:nvPr/>
+      </p:nvGrpSpPr>
+      <p:grpSpPr>
+        <a:xfrm>
+          <a:off x="0" y="0"/>
+          <a:ext cx="0" cy="0"/>
+          <a:chOff x="0" y="0"/>
+          <a:chExt cx="0" cy="0"/>
+        </a:xfrm>
+      </p:grpSpPr>
+      <p:sp>
+        <p:nvSpPr>
+          <p:cNvPr id="221" name="Google Shape;221;p7"/>
+          <p:cNvSpPr/>
+          <p:nvPr/>
+        </p:nvSpPr>
+        <p:spPr>
+          <a:xfrm>
+            <a:off x="0" y="0"/>
+            <a:ext cx="12191695" cy="6858000"/>
+          </a:xfrm>
+          <a:prstGeom prst="rect">
+            <a:avLst/>
+          </a:prstGeom>
+          <a:solidFill>
+            <a:srgbClr val="1A1A2E"/>
+          </a:solidFill>
+          <a:ln>
+            <a:noFill/>
+          </a:ln>
+        </p:spPr>
+        <p:txBody>
+          <a:bodyPr anchorCtr="0" anchor="ctr" bIns="45700" lIns="91425" spcFirstLastPara="1" rIns="91425" wrap="square" tIns="45700">
+            <a:noAutofit/>
+          </a:bodyPr>
+          <a:lstStyle/>
+          <a:p>
+            <a:pPr indent="0" lvl="0" marL="0" marR="0" rtl="0" algn="ctr">
+              <a:spcBef>
+                <a:spcPts val="0"/>
+              </a:spcBef>
+              <a:spcAft>
+                <a:spcPts val="0"/>
+              </a:spcAft>
+              <a:buNone/>
+            </a:pPr>
+            <a:r>
+              <a:t/>
+            </a:r>
+            <a:endParaRPr sz="1800">
+              <a:solidFill>
+                <a:schemeClr val="lt1"/>
+              </a:solidFill>
+              <a:latin typeface="Calibri"/>
+              <a:ea typeface="Calibri"/>
+              <a:cs typeface="Calibri"/>
+              <a:sym typeface="Calibri"/>
+            </a:endParaRPr>
+          </a:p>
+        </p:txBody>
+      </p:sp>
+      <p:sp>
+        <p:nvSpPr>
+          <p:cNvPr id="222" name="Google Shape;222;p7"/>
+          <p:cNvSpPr txBox="1"/>
+          <p:nvPr/>
+        </p:nvSpPr>
+        <p:spPr>
+          <a:xfrm>
+            <a:off x="548640" y="411480"/>
+            <a:ext cx="11094415" cy="640080"/>
+          </a:xfrm>
+          <a:prstGeom prst="rect">
+            <a:avLst/>
+          </a:prstGeom>
+          <a:noFill/>
+          <a:ln>
+            <a:noFill/>
+          </a:ln>
+        </p:spPr>
+        <p:txBody>
+          <a:bodyPr anchorCtr="0" anchor="t" bIns="45700" lIns="91425" spcFirstLastPara="1" rIns="91425" wrap="square" tIns="45700">
+            <a:spAutoFit/>
+          </a:bodyPr>
+          <a:lstStyle/>
+          <a:p>
+            <a:pPr indent="0" lvl="0" marL="0" marR="0" rtl="0" algn="l">
+              <a:spcBef>
+                <a:spcPts val="0"/>
+              </a:spcBef>
+              <a:spcAft>
+                <a:spcPts val="0"/>
+              </a:spcAft>
+              <a:buNone/>
+            </a:pPr>
+            <a:r>
+              <a:rPr b="1" lang="en-US" sz="3600">
+                <a:solidFill>
+                  <a:srgbClr val="FFFFFF"/>
+                </a:solidFill>
+                <a:latin typeface="Calibri"/>
+                <a:ea typeface="Calibri"/>
+                <a:cs typeface="Calibri"/>
+                <a:sym typeface="Calibri"/>
+              </a:rPr>
+              <a:t>Cierre</a:t>
+            </a:r>
+            <a:endParaRPr/>
+          </a:p>
+        </p:txBody>
+      </p:sp>
+      <p:sp>
+        <p:nvSpPr>
+          <p:cNvPr id="223" name="Google Shape;223;p7"/>
+          <p:cNvSpPr/>
+          <p:nvPr/>
+        </p:nvSpPr>
+        <p:spPr>
+          <a:xfrm>
+            <a:off x="548640" y="1051560"/>
+            <a:ext cx="1188720" cy="54864"/>
+          </a:xfrm>
+          <a:prstGeom prst="rect">
+            <a:avLst/>
+          </a:prstGeom>
+          <a:solidFill>
+            <a:srgbClr val="F5A623"/>
+          </a:solidFill>
+          <a:ln>
+            <a:noFill/>
+          </a:ln>
+        </p:spPr>
+        <p:txBody>
+          <a:bodyPr anchorCtr="0" anchor="ctr" bIns="45700" lIns="91425" spcFirstLastPara="1" rIns="91425" wrap="square" tIns="45700">
+            <a:noAutofit/>
+          </a:bodyPr>
+          <a:lstStyle/>
+          <a:p>
+            <a:pPr indent="0" lvl="0" marL="0" marR="0" rtl="0" algn="ctr">
+              <a:spcBef>
+                <a:spcPts val="0"/>
+              </a:spcBef>
+              <a:spcAft>
+                <a:spcPts val="0"/>
+              </a:spcAft>
+              <a:buNone/>
+            </a:pPr>
+            <a:r>
+              <a:t/>
+            </a:r>
+            <a:endParaRPr sz="1800">
+              <a:solidFill>
+                <a:schemeClr val="lt1"/>
+              </a:solidFill>
+              <a:latin typeface="Calibri"/>
+              <a:ea typeface="Calibri"/>
+              <a:cs typeface="Calibri"/>
+              <a:sym typeface="Calibri"/>
+            </a:endParaRPr>
+          </a:p>
+        </p:txBody>
+      </p:sp>
+      <p:sp>
+        <p:nvSpPr>
+          <p:cNvPr id="224" name="Google Shape;224;p7"/>
+          <p:cNvSpPr/>
+          <p:nvPr/>
+        </p:nvSpPr>
+        <p:spPr>
+          <a:xfrm>
+            <a:off x="548640" y="1325880"/>
+            <a:ext cx="11094415" cy="1417320"/>
+          </a:xfrm>
+          <a:prstGeom prst="rect">
+            <a:avLst/>
+          </a:prstGeom>
+          <a:solidFill>
+            <a:srgbClr val="0F162A"/>
+          </a:solidFill>
+          <a:ln>
+            <a:noFill/>
+          </a:ln>
+        </p:spPr>
+        <p:txBody>
+          <a:bodyPr anchorCtr="0" anchor="ctr" bIns="45700" lIns="91425" spcFirstLastPara="1" rIns="91425" wrap="square" tIns="45700">
+            <a:noAutofit/>
+          </a:bodyPr>
+          <a:lstStyle/>
+          <a:p>
+            <a:pPr indent="0" lvl="0" marL="0" marR="0" rtl="0" algn="ctr">
+              <a:spcBef>
+                <a:spcPts val="0"/>
+              </a:spcBef>
+              <a:spcAft>
+                <a:spcPts val="0"/>
+              </a:spcAft>
+              <a:buNone/>
+            </a:pPr>
+            <a:r>
+              <a:t/>
+            </a:r>
+            <a:endParaRPr sz="1800">
+              <a:solidFill>
+                <a:schemeClr val="lt1"/>
+              </a:solidFill>
+              <a:latin typeface="Calibri"/>
+              <a:ea typeface="Calibri"/>
+              <a:cs typeface="Calibri"/>
+              <a:sym typeface="Calibri"/>
+            </a:endParaRPr>
+          </a:p>
+        </p:txBody>
+      </p:sp>
+      <p:sp>
+        <p:nvSpPr>
+          <p:cNvPr id="225" name="Google Shape;225;p7"/>
+          <p:cNvSpPr txBox="1"/>
+          <p:nvPr/>
+        </p:nvSpPr>
+        <p:spPr>
+          <a:xfrm>
+            <a:off x="777240" y="1463039"/>
+            <a:ext cx="1463040" cy="365760"/>
+          </a:xfrm>
+          <a:prstGeom prst="rect">
+            <a:avLst/>
+          </a:prstGeom>
+          <a:noFill/>
+          <a:ln>
+            <a:noFill/>
+          </a:ln>
+        </p:spPr>
+        <p:txBody>
+          <a:bodyPr anchorCtr="0" anchor="t" bIns="45700" lIns="91425" spcFirstLastPara="1" rIns="91425" wrap="square" tIns="45700">
+            <a:spAutoFit/>
+          </a:bodyPr>
+          <a:lstStyle/>
+          <a:p>
+            <a:pPr indent="0" lvl="0" marL="0" marR="0" rtl="0" algn="l">
+              <a:spcBef>
+                <a:spcPts val="0"/>
+              </a:spcBef>
+              <a:spcAft>
+                <a:spcPts val="0"/>
+              </a:spcAft>
+              <a:buNone/>
+            </a:pPr>
+            <a:r>
+              <a:rPr b="1" lang="en-US" sz="1600">
+                <a:solidFill>
+                  <a:srgbClr val="F5A623"/>
+                </a:solidFill>
+                <a:latin typeface="Calibri"/>
+                <a:ea typeface="Calibri"/>
+                <a:cs typeface="Calibri"/>
+                <a:sym typeface="Calibri"/>
+              </a:rPr>
+              <a:t>Objetivo</a:t>
+            </a:r>
+            <a:endParaRPr/>
+          </a:p>
+        </p:txBody>
+      </p:sp>
+      <p:sp>
+        <p:nvSpPr>
+          <p:cNvPr id="226" name="Google Shape;226;p7"/>
+          <p:cNvSpPr txBox="1"/>
+          <p:nvPr/>
+        </p:nvSpPr>
+        <p:spPr>
+          <a:xfrm>
+            <a:off x="2331720" y="1463039"/>
+            <a:ext cx="9082735" cy="1143000"/>
+          </a:xfrm>
+          <a:prstGeom prst="rect">
+            <a:avLst/>
+          </a:prstGeom>
+          <a:noFill/>
+          <a:ln>
+            <a:noFill/>
+          </a:ln>
+        </p:spPr>
+        <p:txBody>
+          <a:bodyPr anchorCtr="0" anchor="t" bIns="45700" lIns="91425" spcFirstLastPara="1" rIns="91425" wrap="square" tIns="45700">
+            <a:normAutofit/>
+          </a:bodyPr>
+          <a:lstStyle/>
+          <a:p>
+            <a:pPr indent="0" lvl="0" marL="0" marR="0" rtl="0" algn="l">
+              <a:spcBef>
+                <a:spcPts val="0"/>
+              </a:spcBef>
+              <a:spcAft>
+                <a:spcPts val="0"/>
+              </a:spcAft>
+              <a:buNone/>
+            </a:pPr>
+            <a:r>
+              <a:rPr b="0" lang="en-US" sz="2200">
+                <a:solidFill>
+                  <a:srgbClr val="FFFFFF"/>
+                </a:solidFill>
+                <a:latin typeface="Calibri"/>
+                <a:ea typeface="Calibri"/>
+                <a:cs typeface="Calibri"/>
+                <a:sym typeface="Calibri"/>
+              </a:rPr>
+              <a:t>Construir programas en Python que utilicen la sentencia </a:t>
+            </a:r>
+            <a:r>
+              <a:rPr b="0" lang="en-US" sz="2200">
+                <a:solidFill>
+                  <a:srgbClr val="4ADFCB"/>
+                </a:solidFill>
+                <a:latin typeface="Consolas"/>
+                <a:ea typeface="Consolas"/>
+                <a:cs typeface="Consolas"/>
+                <a:sym typeface="Consolas"/>
+              </a:rPr>
+              <a:t>for</a:t>
+            </a:r>
+            <a:r>
+              <a:rPr b="0" lang="en-US" sz="2200">
+                <a:solidFill>
+                  <a:srgbClr val="FFFFFF"/>
+                </a:solidFill>
+                <a:latin typeface="Calibri"/>
+                <a:ea typeface="Calibri"/>
+                <a:cs typeface="Calibri"/>
+                <a:sym typeface="Calibri"/>
+              </a:rPr>
+              <a:t> y la función </a:t>
+            </a:r>
+            <a:r>
+              <a:rPr b="0" lang="en-US" sz="2200">
+                <a:solidFill>
+                  <a:srgbClr val="4ADFCB"/>
+                </a:solidFill>
+                <a:latin typeface="Consolas"/>
+                <a:ea typeface="Consolas"/>
+                <a:cs typeface="Consolas"/>
+                <a:sym typeface="Consolas"/>
+              </a:rPr>
+              <a:t>range()</a:t>
+            </a:r>
+            <a:r>
+              <a:rPr b="0" lang="en-US" sz="2200">
+                <a:solidFill>
+                  <a:srgbClr val="FFFFFF"/>
+                </a:solidFill>
+                <a:latin typeface="Calibri"/>
+                <a:ea typeface="Calibri"/>
+                <a:cs typeface="Calibri"/>
+                <a:sym typeface="Calibri"/>
+              </a:rPr>
+              <a:t> para repetir instrucciones y generar secuencias numéricas controladas, con orden.</a:t>
+            </a:r>
+            <a:endParaRPr sz="1900"/>
+          </a:p>
+        </p:txBody>
+      </p:sp>
+      <p:sp>
+        <p:nvSpPr>
+          <p:cNvPr id="227" name="Google Shape;227;p7"/>
+          <p:cNvSpPr/>
+          <p:nvPr/>
+        </p:nvSpPr>
+        <p:spPr>
+          <a:xfrm>
+            <a:off x="548640" y="3017520"/>
+            <a:ext cx="5387187" cy="3429000"/>
+          </a:xfrm>
+          <a:prstGeom prst="rect">
+            <a:avLst/>
+          </a:prstGeom>
+          <a:solidFill>
+            <a:srgbClr val="0F2A43"/>
+          </a:solidFill>
+          <a:ln>
+            <a:noFill/>
+          </a:ln>
+        </p:spPr>
+        <p:txBody>
+          <a:bodyPr anchorCtr="0" anchor="ctr" bIns="45700" lIns="91425" spcFirstLastPara="1" rIns="91425" wrap="square" tIns="45700">
+            <a:noAutofit/>
+          </a:bodyPr>
+          <a:lstStyle/>
+          <a:p>
+            <a:pPr indent="0" lvl="0" marL="0" marR="0" rtl="0" algn="ctr">
+              <a:spcBef>
+                <a:spcPts val="0"/>
+              </a:spcBef>
+              <a:spcAft>
+                <a:spcPts val="0"/>
+              </a:spcAft>
+              <a:buNone/>
+            </a:pPr>
+            <a:r>
+              <a:t/>
+            </a:r>
+            <a:endParaRPr sz="1800">
+              <a:solidFill>
+                <a:schemeClr val="lt1"/>
+              </a:solidFill>
+              <a:latin typeface="Calibri"/>
+              <a:ea typeface="Calibri"/>
+              <a:cs typeface="Calibri"/>
+              <a:sym typeface="Calibri"/>
+            </a:endParaRPr>
+          </a:p>
+        </p:txBody>
+      </p:sp>
+      <p:sp>
+        <p:nvSpPr>
+          <p:cNvPr id="228" name="Google Shape;228;p7"/>
+          <p:cNvSpPr txBox="1"/>
+          <p:nvPr/>
+        </p:nvSpPr>
+        <p:spPr>
+          <a:xfrm>
+            <a:off x="822959" y="3246120"/>
+            <a:ext cx="4838400" cy="411600"/>
+          </a:xfrm>
+          <a:prstGeom prst="rect">
+            <a:avLst/>
+          </a:prstGeom>
+          <a:noFill/>
+          <a:ln>
+            <a:noFill/>
+          </a:ln>
+        </p:spPr>
+        <p:txBody>
+          <a:bodyPr anchorCtr="0" anchor="t" bIns="45700" lIns="91425" spcFirstLastPara="1" rIns="91425" wrap="square" tIns="45700">
+            <a:spAutoFit/>
+          </a:bodyPr>
+          <a:lstStyle/>
+          <a:p>
+            <a:pPr indent="0" lvl="0" marL="0" marR="0" rtl="0" algn="ctr">
+              <a:spcBef>
+                <a:spcPts val="0"/>
+              </a:spcBef>
+              <a:spcAft>
+                <a:spcPts val="0"/>
+              </a:spcAft>
+              <a:buNone/>
+            </a:pPr>
+            <a:r>
+              <a:rPr b="1" lang="en-US" sz="1900">
+                <a:solidFill>
+                  <a:srgbClr val="38BDF8"/>
+                </a:solidFill>
+                <a:latin typeface="Calibri"/>
+                <a:ea typeface="Calibri"/>
+                <a:cs typeface="Calibri"/>
+                <a:sym typeface="Calibri"/>
+              </a:rPr>
+              <a:t>Comprensión 1 a 5</a:t>
+            </a:r>
+            <a:endParaRPr/>
+          </a:p>
+        </p:txBody>
+      </p:sp>
+      <p:sp>
+        <p:nvSpPr>
+          <p:cNvPr id="229" name="Google Shape;229;p7"/>
+          <p:cNvSpPr txBox="1"/>
+          <p:nvPr/>
+        </p:nvSpPr>
+        <p:spPr>
+          <a:xfrm>
+            <a:off x="868680" y="3794759"/>
+            <a:ext cx="4747107" cy="2423160"/>
+          </a:xfrm>
+          <a:prstGeom prst="rect">
+            <a:avLst/>
+          </a:prstGeom>
+          <a:noFill/>
+          <a:ln>
+            <a:noFill/>
+          </a:ln>
+        </p:spPr>
+        <p:txBody>
+          <a:bodyPr anchorCtr="0" anchor="t" bIns="45700" lIns="91425" spcFirstLastPara="1" rIns="91425" wrap="square" tIns="45700">
+            <a:normAutofit/>
+          </a:bodyPr>
+          <a:lstStyle/>
+          <a:p>
+            <a:pPr indent="0" lvl="0" marL="0" marR="0" rtl="0" algn="ctr">
+              <a:spcBef>
+                <a:spcPts val="0"/>
+              </a:spcBef>
+              <a:spcAft>
+                <a:spcPts val="0"/>
+              </a:spcAft>
+              <a:buNone/>
+            </a:pPr>
+            <a:r>
+              <a:rPr b="0" lang="en-US" sz="2200">
+                <a:solidFill>
+                  <a:srgbClr val="FFFFFF"/>
+                </a:solidFill>
+                <a:latin typeface="Calibri"/>
+                <a:ea typeface="Calibri"/>
+                <a:cs typeface="Calibri"/>
+                <a:sym typeface="Calibri"/>
+              </a:rPr>
+              <a:t>¿Qué tan seguro/a te sientes usando </a:t>
+            </a:r>
+            <a:r>
+              <a:rPr b="0" lang="en-US" sz="2200">
+                <a:solidFill>
+                  <a:srgbClr val="4ADFCB"/>
+                </a:solidFill>
+                <a:latin typeface="Consolas"/>
+                <a:ea typeface="Consolas"/>
+                <a:cs typeface="Consolas"/>
+                <a:sym typeface="Consolas"/>
+              </a:rPr>
+              <a:t>for</a:t>
+            </a:r>
+            <a:r>
+              <a:rPr b="0" lang="en-US" sz="2200">
+                <a:solidFill>
+                  <a:srgbClr val="FFFFFF"/>
+                </a:solidFill>
+                <a:latin typeface="Calibri"/>
+                <a:ea typeface="Calibri"/>
+                <a:cs typeface="Calibri"/>
+                <a:sym typeface="Calibri"/>
+              </a:rPr>
+              <a:t> y </a:t>
+            </a:r>
+            <a:r>
+              <a:rPr b="0" lang="en-US" sz="2200">
+                <a:solidFill>
+                  <a:srgbClr val="4ADFCB"/>
+                </a:solidFill>
+                <a:latin typeface="Consolas"/>
+                <a:ea typeface="Consolas"/>
+                <a:cs typeface="Consolas"/>
+                <a:sym typeface="Consolas"/>
+              </a:rPr>
+              <a:t>range()</a:t>
+            </a:r>
+            <a:r>
+              <a:rPr b="0" lang="en-US" sz="2200">
+                <a:solidFill>
+                  <a:srgbClr val="FFFFFF"/>
+                </a:solidFill>
+                <a:latin typeface="Calibri"/>
+                <a:ea typeface="Calibri"/>
+                <a:cs typeface="Calibri"/>
+                <a:sym typeface="Calibri"/>
+              </a:rPr>
+              <a:t> para repetir tareas, donde 1 es "no entendí nada" y 5 es "puedo explicárselo a otro"?</a:t>
+            </a:r>
+            <a:endParaRPr sz="1900"/>
+          </a:p>
+        </p:txBody>
+      </p:sp>
+      <p:sp>
+        <p:nvSpPr>
+          <p:cNvPr id="230" name="Google Shape;230;p7"/>
+          <p:cNvSpPr/>
+          <p:nvPr/>
+        </p:nvSpPr>
+        <p:spPr>
+          <a:xfrm>
+            <a:off x="6255867" y="3017520"/>
+            <a:ext cx="5387187" cy="3429000"/>
+          </a:xfrm>
+          <a:prstGeom prst="rect">
+            <a:avLst/>
+          </a:prstGeom>
+          <a:solidFill>
+            <a:srgbClr val="102A1C"/>
+          </a:solidFill>
+          <a:ln>
+            <a:noFill/>
+          </a:ln>
+        </p:spPr>
+        <p:txBody>
+          <a:bodyPr anchorCtr="0" anchor="ctr" bIns="45700" lIns="91425" spcFirstLastPara="1" rIns="91425" wrap="square" tIns="45700">
+            <a:noAutofit/>
+          </a:bodyPr>
+          <a:lstStyle/>
+          <a:p>
+            <a:pPr indent="0" lvl="0" marL="0" marR="0" rtl="0" algn="ctr">
+              <a:spcBef>
+                <a:spcPts val="0"/>
+              </a:spcBef>
+              <a:spcAft>
+                <a:spcPts val="0"/>
+              </a:spcAft>
+              <a:buNone/>
+            </a:pPr>
+            <a:r>
+              <a:t/>
+            </a:r>
+            <a:endParaRPr sz="1800">
+              <a:solidFill>
+                <a:schemeClr val="lt1"/>
+              </a:solidFill>
+              <a:latin typeface="Calibri"/>
+              <a:ea typeface="Calibri"/>
+              <a:cs typeface="Calibri"/>
+              <a:sym typeface="Calibri"/>
+            </a:endParaRPr>
+          </a:p>
+        </p:txBody>
+      </p:sp>
+      <p:sp>
+        <p:nvSpPr>
+          <p:cNvPr id="231" name="Google Shape;231;p7"/>
+          <p:cNvSpPr txBox="1"/>
+          <p:nvPr/>
+        </p:nvSpPr>
+        <p:spPr>
+          <a:xfrm>
+            <a:off x="6530187" y="3246120"/>
+            <a:ext cx="4838547" cy="411480"/>
+          </a:xfrm>
+          <a:prstGeom prst="rect">
+            <a:avLst/>
+          </a:prstGeom>
+          <a:noFill/>
+          <a:ln>
+            <a:noFill/>
+          </a:ln>
+        </p:spPr>
+        <p:txBody>
+          <a:bodyPr anchorCtr="0" anchor="t" bIns="45700" lIns="91425" spcFirstLastPara="1" rIns="91425" wrap="square" tIns="45700">
+            <a:spAutoFit/>
+          </a:bodyPr>
+          <a:lstStyle/>
+          <a:p>
+            <a:pPr indent="0" lvl="0" marL="0" marR="0" rtl="0" algn="ctr">
+              <a:spcBef>
+                <a:spcPts val="0"/>
+              </a:spcBef>
+              <a:spcAft>
+                <a:spcPts val="0"/>
+              </a:spcAft>
+              <a:buNone/>
+            </a:pPr>
+            <a:r>
+              <a:rPr b="1" lang="en-US" sz="1900">
+                <a:solidFill>
+                  <a:srgbClr val="4ADE80"/>
+                </a:solidFill>
+                <a:latin typeface="Calibri"/>
+                <a:ea typeface="Calibri"/>
+                <a:cs typeface="Calibri"/>
+                <a:sym typeface="Calibri"/>
+              </a:rPr>
+              <a:t>Propósito</a:t>
+            </a:r>
+            <a:endParaRPr/>
+          </a:p>
+        </p:txBody>
+      </p:sp>
+      <p:sp>
+        <p:nvSpPr>
+          <p:cNvPr id="232" name="Google Shape;232;p7"/>
+          <p:cNvSpPr txBox="1"/>
+          <p:nvPr/>
+        </p:nvSpPr>
+        <p:spPr>
+          <a:xfrm>
+            <a:off x="6575907" y="3794759"/>
+            <a:ext cx="4747107" cy="2423160"/>
+          </a:xfrm>
+          <a:prstGeom prst="rect">
+            <a:avLst/>
+          </a:prstGeom>
+          <a:noFill/>
+          <a:ln>
+            <a:noFill/>
+          </a:ln>
+        </p:spPr>
+        <p:txBody>
+          <a:bodyPr anchorCtr="0" anchor="t" bIns="45700" lIns="91425" spcFirstLastPara="1" rIns="91425" wrap="square" tIns="45700">
+            <a:normAutofit/>
+          </a:bodyPr>
+          <a:lstStyle/>
+          <a:p>
+            <a:pPr indent="0" lvl="0" marL="0" marR="0" rtl="0" algn="ctr">
+              <a:spcBef>
+                <a:spcPts val="0"/>
+              </a:spcBef>
+              <a:spcAft>
+                <a:spcPts val="0"/>
+              </a:spcAft>
+              <a:buNone/>
+            </a:pPr>
+            <a:r>
+              <a:rPr b="0" lang="en-US" sz="2200">
+                <a:solidFill>
+                  <a:srgbClr val="FFFFFF"/>
+                </a:solidFill>
+                <a:latin typeface="Calibri"/>
+                <a:ea typeface="Calibri"/>
+                <a:cs typeface="Calibri"/>
+                <a:sym typeface="Calibri"/>
+              </a:rPr>
+              <a:t>¿En qué proceso de tu vida diaria u otro ramo el orden al organizar pasos repetidos evitaría errores?</a:t>
+            </a:r>
+            <a:endParaRPr sz="1900"/>
+          </a:p>
+        </p:txBody>
+      </p:sp>
+    </p:spTree>
+  </p:cSld>
+  <p:clrMapOvr>
+    <a:masterClrMapping/>
+  </p:clrMapOvr>
+</p:sld>
+</file>
+
 <file path=ppt/slides/slide2.xml><?xml version="1.0" encoding="utf-8"?>
 <p:sld xmlns:a="http://schemas.openxmlformats.org/drawingml/2006/main" xmlns:r="http://schemas.openxmlformats.org/officeDocument/2006/relationships" xmlns:mc="http://schemas.openxmlformats.org/markup-compatibility/2006" xmlns:mv="urn:schemas-microsoft-com:mac:vml" xmlns:p="http://schemas.openxmlformats.org/presentationml/2006/main" xmlns:c="http://schemas.openxmlformats.org/drawingml/2006/chart" xmlns:dgm="http://schemas.openxmlformats.org/drawingml/2006/diagram" xmlns:o="urn:schemas-microsoft-com:office:office" xmlns:v="urn:schemas-microsoft-com:vml" xmlns:pvml="urn:schemas-microsoft-com:office:powerpoint" xmlns:com="http://schemas.openxmlformats.org/drawingml/2006/compatibility" xmlns:p14="http://schemas.microsoft.com/office/powerpoint/2010/main" xmlns:p15="http://schemas.microsoft.com/office/powerpoint/2012/main" xmlns:ahyp="http://schemas.microsoft.com/office/drawing/2018/hyperlinkcolor">
   <p:cSld>
@@ -13072,7 +14301,7 @@
         <p:spPr>
           <a:xfrm>
             <a:off x="749808" y="1252728"/>
-            <a:ext cx="10820095" cy="4093428"/>
+            <a:ext cx="10820100" cy="4094400"/>
           </a:xfrm>
           <a:prstGeom prst="rect">
             <a:avLst/>
@@ -13293,7 +14522,31 @@
                 <a:cs typeface="Calibri"/>
                 <a:sym typeface="Calibri"/>
               </a:rPr>
-              <a:t>Con ese bloque en mente, respondan acá: si quisiéramos contar, uno por uno, los partidos que faltan del Mundial,</a:t>
+              <a:t>Con ese bloque en mente, respondan acá: si quisiéramos contar, uno por uno, los partidos que faltan del Mundial desde </a:t>
+            </a:r>
+            <a:r>
+              <a:rPr lang="en-US" sz="2000">
+                <a:solidFill>
+                  <a:srgbClr val="FFFFFF"/>
+                </a:solidFill>
+                <a:latin typeface="Calibri"/>
+                <a:ea typeface="Calibri"/>
+                <a:cs typeface="Calibri"/>
+                <a:sym typeface="Calibri"/>
+              </a:rPr>
+              <a:t>los cuartos de final sin considerar el de tercer lugar</a:t>
+            </a:r>
+            <a:r>
+              <a:rPr b="0" lang="en-US" sz="2000">
+                <a:solidFill>
+                  <a:srgbClr val="FFFFFF"/>
+                </a:solidFill>
+                <a:latin typeface="Calibri"/>
+                <a:ea typeface="Calibri"/>
+                <a:cs typeface="Calibri"/>
+                <a:sym typeface="Calibri"/>
+              </a:rPr>
+              <a:t>,</a:t>
             </a:r>
             <a:endParaRPr/>
           </a:p>
@@ -13380,7 +14633,19 @@
                 <a:cs typeface="Calibri"/>
                 <a:sym typeface="Calibri"/>
               </a:rPr>
-              <a:t>¿Cómo queda la secuencia de números en cada vuelta?</a:t>
+              <a:t>¿Cómo queda la secuencia de números en cada vuelta? ¿</a:t>
+            </a:r>
+            <a:r>
+              <a:rPr lang="en-US" sz="2000">
+                <a:solidFill>
+                  <a:srgbClr val="FFFFFF"/>
+                </a:solidFill>
+                <a:latin typeface="Calibri"/>
+                <a:ea typeface="Calibri"/>
+                <a:cs typeface="Calibri"/>
+                <a:sym typeface="Calibri"/>
+              </a:rPr>
+              <a:t>1,2,3… o 2,4,6… o de qué manera?</a:t>
             </a:r>
             <a:endParaRPr b="0" sz="2000">
               <a:solidFill>
@@ -13713,7 +14978,7 @@
             <a:tbl>
               <a:tblPr bandRow="1" firstRow="1">
                 <a:noFill/>
-                <a:tableStyleId>{3E3F2A8C-4A7E-457A-9F59-DACFF1834618}</a:tableStyleId>
+                <a:tableStyleId>{1EE275E9-B3DF-4A07-940A-6F7083ACD9C3}</a:tableStyleId>
               </a:tblPr>
               <a:tblGrid>
                 <a:gridCol w="5547200"/>
@@ -14385,7 +15650,7 @@
             <a:tbl>
               <a:tblPr bandRow="1" firstRow="1">
                 <a:noFill/>
-                <a:tableStyleId>{3E3F2A8C-4A7E-457A-9F59-DACFF1834618}</a:tableStyleId>
+                <a:tableStyleId>{1EE275E9-B3DF-4A07-940A-6F7083ACD9C3}</a:tableStyleId>
               </a:tblPr>
               <a:tblGrid>
                 <a:gridCol w="5547200"/>
@@ -15213,7 +16478,7 @@
             <a:tbl>
               <a:tblPr bandRow="1" firstRow="1">
                 <a:noFill/>
-                <a:tableStyleId>{3E3F2A8C-4A7E-457A-9F59-DACFF1834618}</a:tableStyleId>
+                <a:tableStyleId>{1EE275E9-B3DF-4A07-940A-6F7083ACD9C3}</a:tableStyleId>
               </a:tblPr>
               <a:tblGrid>
                 <a:gridCol w="5547200"/>
@@ -15605,14 +16870,26 @@
                         <a:buNone/>
                       </a:pPr>
                       <a:r>
-                        <a:rPr b="0" lang="en-US" sz="2000">
+                        <a:rPr lang="en-US" sz="1900">
                           <a:solidFill>
-                            <a:srgbClr val="FFFFFF"/>
+                            <a:srgbClr val="4ADFCB"/>
                           </a:solidFill>
+                          <a:latin typeface="Consolas"/>
+                          <a:ea typeface="Consolas"/>
+                          <a:cs typeface="Consolas"/>
+                          <a:sym typeface="Consolas"/>
                         </a:rPr>
                         <a:t>for numero_partido in range(1, 8, 1):</a:t>
                       </a:r>
-                      <a:endParaRPr sz="2100"/>
+                      <a:endParaRPr sz="1900">
+                        <a:solidFill>
+                          <a:srgbClr val="4ADFCB"/>
+                        </a:solidFill>
+                        <a:latin typeface="Consolas"/>
+                        <a:ea typeface="Consolas"/>
+                        <a:cs typeface="Consolas"/>
+                        <a:sym typeface="Consolas"/>
+                      </a:endParaRPr>
                     </a:p>
                     <a:p>
                       <a:pPr indent="0" lvl="0" marL="0" marR="0" rtl="0" algn="l">
@@ -15625,14 +16902,18 @@
                         <a:buNone/>
                       </a:pPr>
                       <a:r>
-                        <a:rPr b="0" lang="en-US" sz="2000">
+                        <a:rPr lang="en-US" sz="1700">
                           <a:solidFill>
-                            <a:srgbClr val="FFFFFF"/>
+                            <a:srgbClr val="4ADFCB"/>
                           </a:solidFill>
+                          <a:latin typeface="Consolas"/>
+                          <a:ea typeface="Consolas"/>
+                          <a:cs typeface="Consolas"/>
+                          <a:sym typeface="Consolas"/>
                         </a:rPr>
                         <a:t>    print("Partido número", numero_partido)</a:t>
                       </a:r>
-                      <a:endParaRPr sz="2100"/>
+                      <a:endParaRPr sz="1800"/>
                     </a:p>
                   </a:txBody>
                   <a:tcPr marT="45725" marB="45725" marR="91450" marL="91450">
@@ -15656,10 +16937,14 @@
                         <a:buNone/>
                       </a:pPr>
                       <a:r>
-                        <a:rPr b="0" lang="en-US" sz="2000">
+                        <a:rPr b="1" lang="en-US" sz="2000">
                           <a:solidFill>
-                            <a:srgbClr val="FFFFFF"/>
+                            <a:srgbClr val="4ADFCB"/>
                           </a:solidFill>
+                          <a:latin typeface="Consolas"/>
+                          <a:ea typeface="Consolas"/>
+                          <a:cs typeface="Consolas"/>
+                          <a:sym typeface="Consolas"/>
                         </a:rPr>
                         <a:t>range(1, 8, 1)</a:t>
                       </a:r>
@@ -15998,14 +17283,14 @@
       </p:grpSpPr>
       <p:sp>
         <p:nvSpPr>
-          <p:cNvPr id="160" name="Google Shape;160;p5"/>
+          <p:cNvPr id="160" name="Google Shape;160;g3f578362274_0_40"/>
           <p:cNvSpPr/>
           <p:nvPr/>
         </p:nvSpPr>
         <p:spPr>
           <a:xfrm>
             <a:off x="0" y="0"/>
-            <a:ext cx="12191695" cy="6858000"/>
+            <a:ext cx="12191700" cy="6858000"/>
           </a:xfrm>
           <a:prstGeom prst="rect">
             <a:avLst/>
@@ -16049,14 +17334,14 @@
       </p:sp>
       <p:sp>
         <p:nvSpPr>
-          <p:cNvPr id="161" name="Google Shape;161;p5"/>
+          <p:cNvPr id="161" name="Google Shape;161;g3f578362274_0_40"/>
           <p:cNvSpPr/>
           <p:nvPr/>
         </p:nvSpPr>
         <p:spPr>
           <a:xfrm>
             <a:off x="0" y="0"/>
-            <a:ext cx="12191695" cy="502920"/>
+            <a:ext cx="12191700" cy="502800"/>
           </a:xfrm>
           <a:prstGeom prst="rect">
             <a:avLst/>
@@ -16100,14 +17385,14 @@
       </p:sp>
       <p:sp>
         <p:nvSpPr>
-          <p:cNvPr id="162" name="Google Shape;162;p5"/>
+          <p:cNvPr id="162" name="Google Shape;162;g3f578362274_0_40"/>
           <p:cNvSpPr txBox="1"/>
           <p:nvPr/>
         </p:nvSpPr>
         <p:spPr>
           <a:xfrm>
             <a:off x="411479" y="118872"/>
-            <a:ext cx="5486400" cy="320040"/>
+            <a:ext cx="5486400" cy="276900"/>
           </a:xfrm>
           <a:prstGeom prst="rect">
             <a:avLst/>
@@ -16150,14 +17435,14 @@
       </p:sp>
       <p:sp>
         <p:nvSpPr>
-          <p:cNvPr id="163" name="Google Shape;163;p5"/>
+          <p:cNvPr id="163" name="Google Shape;163;g3f578362274_0_40"/>
           <p:cNvSpPr txBox="1"/>
           <p:nvPr/>
         </p:nvSpPr>
         <p:spPr>
           <a:xfrm>
             <a:off x="8534095" y="118872"/>
-            <a:ext cx="3200400" cy="320040"/>
+            <a:ext cx="3200400" cy="276900"/>
           </a:xfrm>
           <a:prstGeom prst="rect">
             <a:avLst/>
@@ -16200,14 +17485,14 @@
       </p:sp>
       <p:sp>
         <p:nvSpPr>
-          <p:cNvPr id="164" name="Google Shape;164;p5"/>
+          <p:cNvPr id="164" name="Google Shape;164;g3f578362274_0_40"/>
           <p:cNvSpPr txBox="1"/>
           <p:nvPr/>
         </p:nvSpPr>
         <p:spPr>
           <a:xfrm>
             <a:off x="548640" y="868680"/>
-            <a:ext cx="11094415" cy="685800"/>
+            <a:ext cx="11094300" cy="585000"/>
           </a:xfrm>
           <a:prstGeom prst="rect">
             <a:avLst/>
@@ -16250,14 +17535,14 @@
       </p:sp>
       <p:sp>
         <p:nvSpPr>
-          <p:cNvPr id="165" name="Google Shape;165;p5"/>
+          <p:cNvPr id="165" name="Google Shape;165;g3f578362274_0_40"/>
           <p:cNvSpPr/>
           <p:nvPr/>
         </p:nvSpPr>
         <p:spPr>
           <a:xfrm>
             <a:off x="548640" y="1508760"/>
-            <a:ext cx="11094415" cy="1708464"/>
+            <a:ext cx="11094300" cy="1708500"/>
           </a:xfrm>
           <a:prstGeom prst="rect">
             <a:avLst/>
@@ -16301,14 +17586,14 @@
       </p:sp>
       <p:sp>
         <p:nvSpPr>
-          <p:cNvPr id="166" name="Google Shape;166;p5"/>
+          <p:cNvPr id="166" name="Google Shape;166;g3f578362274_0_40"/>
           <p:cNvSpPr/>
           <p:nvPr/>
         </p:nvSpPr>
         <p:spPr>
           <a:xfrm>
             <a:off x="548640" y="1508760"/>
-            <a:ext cx="73152" cy="1708464"/>
+            <a:ext cx="73200" cy="1708500"/>
           </a:xfrm>
           <a:prstGeom prst="rect">
             <a:avLst/>
@@ -16352,14 +17637,14 @@
       </p:sp>
       <p:sp>
         <p:nvSpPr>
-          <p:cNvPr id="167" name="Google Shape;167;p5"/>
+          <p:cNvPr id="167" name="Google Shape;167;g3f578362274_0_40"/>
           <p:cNvSpPr txBox="1"/>
           <p:nvPr/>
         </p:nvSpPr>
         <p:spPr>
           <a:xfrm>
             <a:off x="777240" y="1600200"/>
-            <a:ext cx="10728655" cy="347472"/>
+            <a:ext cx="10728600" cy="369300"/>
           </a:xfrm>
           <a:prstGeom prst="rect">
             <a:avLst/>
@@ -16402,7 +17687,7 @@
       </p:sp>
       <p:sp>
         <p:nvSpPr>
-          <p:cNvPr id="168" name="Google Shape;168;p5"/>
+          <p:cNvPr id="168" name="Google Shape;168;g3f578362274_0_40"/>
           <p:cNvSpPr txBox="1"/>
           <p:nvPr/>
         </p:nvSpPr>
@@ -16476,14 +17761,14 @@
       </p:sp>
       <p:sp>
         <p:nvSpPr>
-          <p:cNvPr id="169" name="Google Shape;169;p5"/>
+          <p:cNvPr id="169" name="Google Shape;169;g3f578362274_0_40"/>
           <p:cNvSpPr txBox="1"/>
           <p:nvPr/>
         </p:nvSpPr>
         <p:spPr>
           <a:xfrm>
             <a:off x="548640" y="3381816"/>
-            <a:ext cx="4572000" cy="347472"/>
+            <a:ext cx="4572000" cy="369300"/>
           </a:xfrm>
           <a:prstGeom prst="rect">
             <a:avLst/>
@@ -16526,14 +17811,14 @@
       </p:sp>
       <p:sp>
         <p:nvSpPr>
-          <p:cNvPr id="170" name="Google Shape;170;p5"/>
+          <p:cNvPr id="170" name="Google Shape;170;g3f578362274_0_40"/>
           <p:cNvSpPr/>
           <p:nvPr/>
         </p:nvSpPr>
         <p:spPr>
           <a:xfrm>
             <a:off x="548640" y="3729288"/>
-            <a:ext cx="11094415" cy="1930481"/>
+            <a:ext cx="11094300" cy="1930500"/>
           </a:xfrm>
           <a:prstGeom prst="rect">
             <a:avLst/>
@@ -16577,14 +17862,14 @@
       </p:sp>
       <p:sp>
         <p:nvSpPr>
-          <p:cNvPr id="171" name="Google Shape;171;p5"/>
+          <p:cNvPr id="171" name="Google Shape;171;g3f578362274_0_40"/>
           <p:cNvSpPr/>
           <p:nvPr/>
         </p:nvSpPr>
         <p:spPr>
           <a:xfrm>
             <a:off x="548640" y="3729288"/>
-            <a:ext cx="11094415" cy="91440"/>
+            <a:ext cx="11094300" cy="91500"/>
           </a:xfrm>
           <a:prstGeom prst="rect">
             <a:avLst/>
@@ -16628,14 +17913,14 @@
       </p:sp>
       <p:sp>
         <p:nvSpPr>
-          <p:cNvPr id="172" name="Google Shape;172;p5"/>
+          <p:cNvPr id="172" name="Google Shape;172;g3f578362274_0_40"/>
           <p:cNvSpPr txBox="1"/>
           <p:nvPr/>
         </p:nvSpPr>
         <p:spPr>
           <a:xfrm>
             <a:off x="731520" y="3866448"/>
-            <a:ext cx="10820095" cy="1701881"/>
+            <a:ext cx="10820100" cy="1631700"/>
           </a:xfrm>
           <a:prstGeom prst="rect">
             <a:avLst/>
@@ -16697,6 +17982,835 @@
               <a:t>  for numero_partido in range(1, 5):</a:t>
             </a:r>
             <a:endParaRPr/>
+          </a:p>
+          <a:p>
+            <a:pPr indent="0" lvl="0" marL="0" marR="0" rtl="0" algn="l">
+              <a:spcBef>
+                <a:spcPts val="0"/>
+              </a:spcBef>
+              <a:spcAft>
+                <a:spcPts val="0"/>
+              </a:spcAft>
+              <a:buNone/>
+            </a:pPr>
+            <a:r>
+              <a:rPr b="0" lang="en-US" sz="2000">
+                <a:solidFill>
+                  <a:srgbClr val="4ADFCB"/>
+                </a:solidFill>
+                <a:latin typeface="Consolas"/>
+                <a:ea typeface="Consolas"/>
+                <a:cs typeface="Consolas"/>
+                <a:sym typeface="Consolas"/>
+              </a:rPr>
+              <a:t>      goles_totales = goles_totales + 2</a:t>
+            </a:r>
+            <a:endParaRPr/>
+          </a:p>
+          <a:p>
+            <a:pPr indent="0" lvl="0" marL="0" marR="0" rtl="0" algn="l">
+              <a:spcBef>
+                <a:spcPts val="0"/>
+              </a:spcBef>
+              <a:spcAft>
+                <a:spcPts val="0"/>
+              </a:spcAft>
+              <a:buNone/>
+            </a:pPr>
+            <a:r>
+              <a:rPr b="0" lang="en-US" sz="2000">
+                <a:solidFill>
+                  <a:srgbClr val="4ADFCB"/>
+                </a:solidFill>
+                <a:latin typeface="Consolas"/>
+                <a:ea typeface="Consolas"/>
+                <a:cs typeface="Consolas"/>
+                <a:sym typeface="Consolas"/>
+              </a:rPr>
+              <a:t>  print("Goles totales estimados:", goles_totales)</a:t>
+            </a:r>
+            <a:endParaRPr/>
+          </a:p>
+          <a:p>
+            <a:pPr indent="0" lvl="0" marL="0" marR="0" rtl="0" algn="l">
+              <a:spcBef>
+                <a:spcPts val="0"/>
+              </a:spcBef>
+              <a:spcAft>
+                <a:spcPts val="0"/>
+              </a:spcAft>
+              <a:buNone/>
+            </a:pPr>
+            <a:r>
+              <a:rPr b="0" lang="en-US" sz="2000">
+                <a:solidFill>
+                  <a:srgbClr val="4ADFCB"/>
+                </a:solidFill>
+                <a:latin typeface="Consolas"/>
+                <a:ea typeface="Consolas"/>
+                <a:cs typeface="Consolas"/>
+                <a:sym typeface="Consolas"/>
+              </a:rPr>
+              <a:t>  # &gt;&gt; Goles totales estimados: 8</a:t>
+            </a:r>
+            <a:endParaRPr/>
+          </a:p>
+        </p:txBody>
+      </p:sp>
+    </p:spTree>
+  </p:cSld>
+  <p:clrMapOvr>
+    <a:masterClrMapping/>
+  </p:clrMapOvr>
+</p:sld>
+</file>
+
+<file path=ppt/slides/slide8.xml><?xml version="1.0" encoding="utf-8"?>
+<p:sld xmlns:a="http://schemas.openxmlformats.org/drawingml/2006/main" xmlns:r="http://schemas.openxmlformats.org/officeDocument/2006/relationships" xmlns:mc="http://schemas.openxmlformats.org/markup-compatibility/2006" xmlns:mv="urn:schemas-microsoft-com:mac:vml" xmlns:p="http://schemas.openxmlformats.org/presentationml/2006/main" xmlns:c="http://schemas.openxmlformats.org/drawingml/2006/chart" xmlns:dgm="http://schemas.openxmlformats.org/drawingml/2006/diagram" xmlns:o="urn:schemas-microsoft-com:office:office" xmlns:v="urn:schemas-microsoft-com:vml" xmlns:pvml="urn:schemas-microsoft-com:office:powerpoint" xmlns:com="http://schemas.openxmlformats.org/drawingml/2006/compatibility" xmlns:p14="http://schemas.microsoft.com/office/powerpoint/2010/main" xmlns:p15="http://schemas.microsoft.com/office/powerpoint/2012/main" xmlns:ahyp="http://schemas.microsoft.com/office/drawing/2018/hyperlinkcolor">
+  <p:cSld>
+    <p:spTree>
+      <p:nvGrpSpPr>
+        <p:cNvPr id="176" name="Shape 176"/>
+        <p:cNvGrpSpPr/>
+        <p:nvPr/>
+      </p:nvGrpSpPr>
+      <p:grpSpPr>
+        <a:xfrm>
+          <a:off x="0" y="0"/>
+          <a:ext cx="0" cy="0"/>
+          <a:chOff x="0" y="0"/>
+          <a:chExt cx="0" cy="0"/>
+        </a:xfrm>
+      </p:grpSpPr>
+      <p:sp>
+        <p:nvSpPr>
+          <p:cNvPr id="177" name="Google Shape;177;p5"/>
+          <p:cNvSpPr/>
+          <p:nvPr/>
+        </p:nvSpPr>
+        <p:spPr>
+          <a:xfrm>
+            <a:off x="0" y="0"/>
+            <a:ext cx="12191700" cy="6858000"/>
+          </a:xfrm>
+          <a:prstGeom prst="rect">
+            <a:avLst/>
+          </a:prstGeom>
+          <a:solidFill>
+            <a:srgbClr val="1A1A2E"/>
+          </a:solidFill>
+          <a:ln>
+            <a:noFill/>
+          </a:ln>
+        </p:spPr>
+        <p:txBody>
+          <a:bodyPr anchorCtr="0" anchor="ctr" bIns="45700" lIns="91425" spcFirstLastPara="1" rIns="91425" wrap="square" tIns="45700">
+            <a:noAutofit/>
+          </a:bodyPr>
+          <a:lstStyle/>
+          <a:p>
+            <a:pPr indent="0" lvl="0" marL="0" marR="0" rtl="0" algn="ctr">
+              <a:spcBef>
+                <a:spcPts val="0"/>
+              </a:spcBef>
+              <a:spcAft>
+                <a:spcPts val="0"/>
+              </a:spcAft>
+              <a:buNone/>
+            </a:pPr>
+            <a:r>
+              <a:t/>
+            </a:r>
+            <a:endParaRPr sz="1800">
+              <a:solidFill>
+                <a:schemeClr val="lt1"/>
+              </a:solidFill>
+              <a:latin typeface="Calibri"/>
+              <a:ea typeface="Calibri"/>
+              <a:cs typeface="Calibri"/>
+              <a:sym typeface="Calibri"/>
+            </a:endParaRPr>
+          </a:p>
+        </p:txBody>
+      </p:sp>
+      <p:sp>
+        <p:nvSpPr>
+          <p:cNvPr id="178" name="Google Shape;178;p5"/>
+          <p:cNvSpPr/>
+          <p:nvPr/>
+        </p:nvSpPr>
+        <p:spPr>
+          <a:xfrm>
+            <a:off x="0" y="0"/>
+            <a:ext cx="12191700" cy="502800"/>
+          </a:xfrm>
+          <a:prstGeom prst="rect">
+            <a:avLst/>
+          </a:prstGeom>
+          <a:solidFill>
+            <a:srgbClr val="0F162A"/>
+          </a:solidFill>
+          <a:ln>
+            <a:noFill/>
+          </a:ln>
+        </p:spPr>
+        <p:txBody>
+          <a:bodyPr anchorCtr="0" anchor="ctr" bIns="45700" lIns="91425" spcFirstLastPara="1" rIns="91425" wrap="square" tIns="45700">
+            <a:noAutofit/>
+          </a:bodyPr>
+          <a:lstStyle/>
+          <a:p>
+            <a:pPr indent="0" lvl="0" marL="0" marR="0" rtl="0" algn="ctr">
+              <a:spcBef>
+                <a:spcPts val="0"/>
+              </a:spcBef>
+              <a:spcAft>
+                <a:spcPts val="0"/>
+              </a:spcAft>
+              <a:buNone/>
+            </a:pPr>
+            <a:r>
+              <a:t/>
+            </a:r>
+            <a:endParaRPr sz="1800">
+              <a:solidFill>
+                <a:schemeClr val="lt1"/>
+              </a:solidFill>
+              <a:latin typeface="Calibri"/>
+              <a:ea typeface="Calibri"/>
+              <a:cs typeface="Calibri"/>
+              <a:sym typeface="Calibri"/>
+            </a:endParaRPr>
+          </a:p>
+        </p:txBody>
+      </p:sp>
+      <p:sp>
+        <p:nvSpPr>
+          <p:cNvPr id="179" name="Google Shape;179;p5"/>
+          <p:cNvSpPr txBox="1"/>
+          <p:nvPr/>
+        </p:nvSpPr>
+        <p:spPr>
+          <a:xfrm>
+            <a:off x="411479" y="118872"/>
+            <a:ext cx="5486400" cy="320100"/>
+          </a:xfrm>
+          <a:prstGeom prst="rect">
+            <a:avLst/>
+          </a:prstGeom>
+          <a:noFill/>
+          <a:ln>
+            <a:noFill/>
+          </a:ln>
+        </p:spPr>
+        <p:txBody>
+          <a:bodyPr anchorCtr="0" anchor="ctr" bIns="45700" lIns="91425" spcFirstLastPara="1" rIns="91425" wrap="square" tIns="45700">
+            <a:spAutoFit/>
+          </a:bodyPr>
+          <a:lstStyle/>
+          <a:p>
+            <a:pPr indent="0" lvl="0" marL="0" marR="0" rtl="0" algn="l">
+              <a:spcBef>
+                <a:spcPts val="0"/>
+              </a:spcBef>
+              <a:spcAft>
+                <a:spcPts val="0"/>
+              </a:spcAft>
+              <a:buNone/>
+            </a:pPr>
+            <a:r>
+              <a:rPr b="0" lang="en-US" sz="1200">
+                <a:solidFill>
+                  <a:srgbClr val="94A3B8"/>
+                </a:solidFill>
+                <a:latin typeface="Consolas"/>
+                <a:ea typeface="Consolas"/>
+                <a:cs typeface="Consolas"/>
+                <a:sym typeface="Consolas"/>
+              </a:rPr>
+              <a:t>🐍 Python · Clase 16</a:t>
+            </a:r>
+            <a:endParaRPr/>
+          </a:p>
+        </p:txBody>
+      </p:sp>
+      <p:sp>
+        <p:nvSpPr>
+          <p:cNvPr id="180" name="Google Shape;180;p5"/>
+          <p:cNvSpPr txBox="1"/>
+          <p:nvPr/>
+        </p:nvSpPr>
+        <p:spPr>
+          <a:xfrm>
+            <a:off x="8534095" y="118872"/>
+            <a:ext cx="3200400" cy="320100"/>
+          </a:xfrm>
+          <a:prstGeom prst="rect">
+            <a:avLst/>
+          </a:prstGeom>
+          <a:noFill/>
+          <a:ln>
+            <a:noFill/>
+          </a:ln>
+        </p:spPr>
+        <p:txBody>
+          <a:bodyPr anchorCtr="0" anchor="ctr" bIns="45700" lIns="91425" spcFirstLastPara="1" rIns="91425" wrap="square" tIns="45700">
+            <a:spAutoFit/>
+          </a:bodyPr>
+          <a:lstStyle/>
+          <a:p>
+            <a:pPr indent="0" lvl="0" marL="0" marR="0" rtl="0" algn="r">
+              <a:spcBef>
+                <a:spcPts val="0"/>
+              </a:spcBef>
+              <a:spcAft>
+                <a:spcPts val="0"/>
+              </a:spcAft>
+              <a:buNone/>
+            </a:pPr>
+            <a:r>
+              <a:rPr b="1" lang="en-US" sz="1200">
+                <a:solidFill>
+                  <a:srgbClr val="0F9B8E"/>
+                </a:solidFill>
+                <a:latin typeface="Consolas"/>
+                <a:ea typeface="Consolas"/>
+                <a:cs typeface="Consolas"/>
+                <a:sym typeface="Consolas"/>
+              </a:rPr>
+              <a:t>Contenido nuevo</a:t>
+            </a:r>
+            <a:endParaRPr/>
+          </a:p>
+        </p:txBody>
+      </p:sp>
+      <p:sp>
+        <p:nvSpPr>
+          <p:cNvPr id="181" name="Google Shape;181;p5"/>
+          <p:cNvSpPr txBox="1"/>
+          <p:nvPr/>
+        </p:nvSpPr>
+        <p:spPr>
+          <a:xfrm>
+            <a:off x="548640" y="868680"/>
+            <a:ext cx="11094300" cy="685800"/>
+          </a:xfrm>
+          <a:prstGeom prst="rect">
+            <a:avLst/>
+          </a:prstGeom>
+          <a:noFill/>
+          <a:ln>
+            <a:noFill/>
+          </a:ln>
+        </p:spPr>
+        <p:txBody>
+          <a:bodyPr anchorCtr="0" anchor="t" bIns="45700" lIns="91425" spcFirstLastPara="1" rIns="91425" wrap="square" tIns="45700">
+            <a:spAutoFit/>
+          </a:bodyPr>
+          <a:lstStyle/>
+          <a:p>
+            <a:pPr indent="0" lvl="0" marL="0" marR="0" rtl="0" algn="l">
+              <a:spcBef>
+                <a:spcPts val="0"/>
+              </a:spcBef>
+              <a:spcAft>
+                <a:spcPts val="0"/>
+              </a:spcAft>
+              <a:buNone/>
+            </a:pPr>
+            <a:r>
+              <a:rPr b="1" lang="en-US" sz="3200">
+                <a:solidFill>
+                  <a:srgbClr val="FFFFFF"/>
+                </a:solidFill>
+                <a:latin typeface="Calibri"/>
+                <a:ea typeface="Calibri"/>
+                <a:cs typeface="Calibri"/>
+                <a:sym typeface="Calibri"/>
+              </a:rPr>
+              <a:t>📘 2. Acumulador dentro de un bucle</a:t>
+            </a:r>
+            <a:endParaRPr/>
+          </a:p>
+        </p:txBody>
+      </p:sp>
+      <p:sp>
+        <p:nvSpPr>
+          <p:cNvPr id="182" name="Google Shape;182;p5"/>
+          <p:cNvSpPr/>
+          <p:nvPr/>
+        </p:nvSpPr>
+        <p:spPr>
+          <a:xfrm>
+            <a:off x="548640" y="1508760"/>
+            <a:ext cx="11094300" cy="1708500"/>
+          </a:xfrm>
+          <a:prstGeom prst="rect">
+            <a:avLst/>
+          </a:prstGeom>
+          <a:solidFill>
+            <a:srgbClr val="16213E"/>
+          </a:solidFill>
+          <a:ln>
+            <a:noFill/>
+          </a:ln>
+        </p:spPr>
+        <p:txBody>
+          <a:bodyPr anchorCtr="0" anchor="ctr" bIns="45700" lIns="91425" spcFirstLastPara="1" rIns="91425" wrap="square" tIns="45700">
+            <a:noAutofit/>
+          </a:bodyPr>
+          <a:lstStyle/>
+          <a:p>
+            <a:pPr indent="0" lvl="0" marL="0" marR="0" rtl="0" algn="ctr">
+              <a:spcBef>
+                <a:spcPts val="0"/>
+              </a:spcBef>
+              <a:spcAft>
+                <a:spcPts val="0"/>
+              </a:spcAft>
+              <a:buNone/>
+            </a:pPr>
+            <a:r>
+              <a:t/>
+            </a:r>
+            <a:endParaRPr sz="1800">
+              <a:solidFill>
+                <a:schemeClr val="lt1"/>
+              </a:solidFill>
+              <a:latin typeface="Calibri"/>
+              <a:ea typeface="Calibri"/>
+              <a:cs typeface="Calibri"/>
+              <a:sym typeface="Calibri"/>
+            </a:endParaRPr>
+          </a:p>
+        </p:txBody>
+      </p:sp>
+      <p:sp>
+        <p:nvSpPr>
+          <p:cNvPr id="183" name="Google Shape;183;p5"/>
+          <p:cNvSpPr/>
+          <p:nvPr/>
+        </p:nvSpPr>
+        <p:spPr>
+          <a:xfrm>
+            <a:off x="548640" y="1508760"/>
+            <a:ext cx="73200" cy="1708500"/>
+          </a:xfrm>
+          <a:prstGeom prst="rect">
+            <a:avLst/>
+          </a:prstGeom>
+          <a:solidFill>
+            <a:srgbClr val="0F9B8E"/>
+          </a:solidFill>
+          <a:ln>
+            <a:noFill/>
+          </a:ln>
+        </p:spPr>
+        <p:txBody>
+          <a:bodyPr anchorCtr="0" anchor="ctr" bIns="45700" lIns="91425" spcFirstLastPara="1" rIns="91425" wrap="square" tIns="45700">
+            <a:noAutofit/>
+          </a:bodyPr>
+          <a:lstStyle/>
+          <a:p>
+            <a:pPr indent="0" lvl="0" marL="0" marR="0" rtl="0" algn="ctr">
+              <a:spcBef>
+                <a:spcPts val="0"/>
+              </a:spcBef>
+              <a:spcAft>
+                <a:spcPts val="0"/>
+              </a:spcAft>
+              <a:buNone/>
+            </a:pPr>
+            <a:r>
+              <a:t/>
+            </a:r>
+            <a:endParaRPr sz="1800">
+              <a:solidFill>
+                <a:schemeClr val="lt1"/>
+              </a:solidFill>
+              <a:latin typeface="Calibri"/>
+              <a:ea typeface="Calibri"/>
+              <a:cs typeface="Calibri"/>
+              <a:sym typeface="Calibri"/>
+            </a:endParaRPr>
+          </a:p>
+        </p:txBody>
+      </p:sp>
+      <p:sp>
+        <p:nvSpPr>
+          <p:cNvPr id="184" name="Google Shape;184;p5"/>
+          <p:cNvSpPr txBox="1"/>
+          <p:nvPr/>
+        </p:nvSpPr>
+        <p:spPr>
+          <a:xfrm>
+            <a:off x="777240" y="1600200"/>
+            <a:ext cx="10728600" cy="347400"/>
+          </a:xfrm>
+          <a:prstGeom prst="rect">
+            <a:avLst/>
+          </a:prstGeom>
+          <a:noFill/>
+          <a:ln>
+            <a:noFill/>
+          </a:ln>
+        </p:spPr>
+        <p:txBody>
+          <a:bodyPr anchorCtr="0" anchor="t" bIns="45700" lIns="91425" spcFirstLastPara="1" rIns="91425" wrap="square" tIns="45700">
+            <a:spAutoFit/>
+          </a:bodyPr>
+          <a:lstStyle/>
+          <a:p>
+            <a:pPr indent="0" lvl="0" marL="0" marR="0" rtl="0" algn="l">
+              <a:spcBef>
+                <a:spcPts val="0"/>
+              </a:spcBef>
+              <a:spcAft>
+                <a:spcPts val="0"/>
+              </a:spcAft>
+              <a:buNone/>
+            </a:pPr>
+            <a:r>
+              <a:rPr b="1" lang="en-US" sz="1800">
+                <a:solidFill>
+                  <a:srgbClr val="0F9B8E"/>
+                </a:solidFill>
+                <a:latin typeface="Calibri"/>
+                <a:ea typeface="Calibri"/>
+                <a:cs typeface="Calibri"/>
+                <a:sym typeface="Calibri"/>
+              </a:rPr>
+              <a:t>📘  Definición</a:t>
+            </a:r>
+            <a:endParaRPr/>
+          </a:p>
+        </p:txBody>
+      </p:sp>
+      <p:sp>
+        <p:nvSpPr>
+          <p:cNvPr id="185" name="Google Shape;185;p5"/>
+          <p:cNvSpPr txBox="1"/>
+          <p:nvPr/>
+        </p:nvSpPr>
+        <p:spPr>
+          <a:xfrm>
+            <a:off x="777240" y="1901951"/>
+            <a:ext cx="10728600" cy="1293000"/>
+          </a:xfrm>
+          <a:prstGeom prst="rect">
+            <a:avLst/>
+          </a:prstGeom>
+          <a:noFill/>
+          <a:ln>
+            <a:noFill/>
+          </a:ln>
+        </p:spPr>
+        <p:txBody>
+          <a:bodyPr anchorCtr="0" anchor="t" bIns="45700" lIns="91425" spcFirstLastPara="1" rIns="91425" wrap="square" tIns="45700">
+            <a:spAutoFit/>
+          </a:bodyPr>
+          <a:lstStyle/>
+          <a:p>
+            <a:pPr indent="0" lvl="0" marL="0" marR="0" rtl="0" algn="l">
+              <a:spcBef>
+                <a:spcPts val="0"/>
+              </a:spcBef>
+              <a:spcAft>
+                <a:spcPts val="0"/>
+              </a:spcAft>
+              <a:buNone/>
+            </a:pPr>
+            <a:r>
+              <a:rPr b="0" lang="en-US" sz="2600">
+                <a:solidFill>
+                  <a:srgbClr val="FFFFFF"/>
+                </a:solidFill>
+                <a:latin typeface="Calibri"/>
+                <a:ea typeface="Calibri"/>
+                <a:cs typeface="Calibri"/>
+                <a:sym typeface="Calibri"/>
+              </a:rPr>
+              <a:t>una variable "acumuladora" se inicializa en 0 ANTES del </a:t>
+            </a:r>
+            <a:r>
+              <a:rPr b="0" lang="en-US" sz="2600">
+                <a:solidFill>
+                  <a:srgbClr val="4ADFCB"/>
+                </a:solidFill>
+                <a:latin typeface="Consolas"/>
+                <a:ea typeface="Consolas"/>
+                <a:cs typeface="Consolas"/>
+                <a:sym typeface="Consolas"/>
+              </a:rPr>
+              <a:t>for</a:t>
+            </a:r>
+            <a:r>
+              <a:rPr b="0" lang="en-US" sz="2600">
+                <a:solidFill>
+                  <a:srgbClr val="FFFFFF"/>
+                </a:solidFill>
+                <a:latin typeface="Calibri"/>
+                <a:ea typeface="Calibri"/>
+                <a:cs typeface="Calibri"/>
+                <a:sym typeface="Calibri"/>
+              </a:rPr>
+              <a:t>, fuera del bloque indentado, y dentro del bucle se le suma un valor en cada vuelta para ir guardando un total.</a:t>
+            </a:r>
+            <a:endParaRPr sz="2000"/>
+          </a:p>
+        </p:txBody>
+      </p:sp>
+      <p:sp>
+        <p:nvSpPr>
+          <p:cNvPr id="186" name="Google Shape;186;p5"/>
+          <p:cNvSpPr txBox="1"/>
+          <p:nvPr/>
+        </p:nvSpPr>
+        <p:spPr>
+          <a:xfrm>
+            <a:off x="548640" y="3381816"/>
+            <a:ext cx="4572000" cy="347400"/>
+          </a:xfrm>
+          <a:prstGeom prst="rect">
+            <a:avLst/>
+          </a:prstGeom>
+          <a:noFill/>
+          <a:ln>
+            <a:noFill/>
+          </a:ln>
+        </p:spPr>
+        <p:txBody>
+          <a:bodyPr anchorCtr="0" anchor="t" bIns="45700" lIns="91425" spcFirstLastPara="1" rIns="91425" wrap="square" tIns="45700">
+            <a:spAutoFit/>
+          </a:bodyPr>
+          <a:lstStyle/>
+          <a:p>
+            <a:pPr indent="0" lvl="0" marL="0" marR="0" rtl="0" algn="l">
+              <a:spcBef>
+                <a:spcPts val="0"/>
+              </a:spcBef>
+              <a:spcAft>
+                <a:spcPts val="0"/>
+              </a:spcAft>
+              <a:buNone/>
+            </a:pPr>
+            <a:r>
+              <a:rPr b="1" lang="en-US" sz="1800">
+                <a:solidFill>
+                  <a:srgbClr val="F5A623"/>
+                </a:solidFill>
+                <a:latin typeface="Calibri"/>
+                <a:ea typeface="Calibri"/>
+                <a:cs typeface="Calibri"/>
+                <a:sym typeface="Calibri"/>
+              </a:rPr>
+              <a:t>💻  Ejemplo</a:t>
+            </a:r>
+            <a:endParaRPr/>
+          </a:p>
+        </p:txBody>
+      </p:sp>
+      <p:sp>
+        <p:nvSpPr>
+          <p:cNvPr id="187" name="Google Shape;187;p5"/>
+          <p:cNvSpPr/>
+          <p:nvPr/>
+        </p:nvSpPr>
+        <p:spPr>
+          <a:xfrm>
+            <a:off x="548640" y="3729288"/>
+            <a:ext cx="11094300" cy="1930500"/>
+          </a:xfrm>
+          <a:prstGeom prst="rect">
+            <a:avLst/>
+          </a:prstGeom>
+          <a:solidFill>
+            <a:srgbClr val="0D1117"/>
+          </a:solidFill>
+          <a:ln>
+            <a:noFill/>
+          </a:ln>
+        </p:spPr>
+        <p:txBody>
+          <a:bodyPr anchorCtr="0" anchor="ctr" bIns="45700" lIns="91425" spcFirstLastPara="1" rIns="91425" wrap="square" tIns="45700">
+            <a:noAutofit/>
+          </a:bodyPr>
+          <a:lstStyle/>
+          <a:p>
+            <a:pPr indent="0" lvl="0" marL="0" marR="0" rtl="0" algn="ctr">
+              <a:spcBef>
+                <a:spcPts val="0"/>
+              </a:spcBef>
+              <a:spcAft>
+                <a:spcPts val="0"/>
+              </a:spcAft>
+              <a:buNone/>
+            </a:pPr>
+            <a:r>
+              <a:t/>
+            </a:r>
+            <a:endParaRPr sz="1800">
+              <a:solidFill>
+                <a:schemeClr val="lt1"/>
+              </a:solidFill>
+              <a:latin typeface="Calibri"/>
+              <a:ea typeface="Calibri"/>
+              <a:cs typeface="Calibri"/>
+              <a:sym typeface="Calibri"/>
+            </a:endParaRPr>
+          </a:p>
+        </p:txBody>
+      </p:sp>
+      <p:sp>
+        <p:nvSpPr>
+          <p:cNvPr id="188" name="Google Shape;188;p5"/>
+          <p:cNvSpPr/>
+          <p:nvPr/>
+        </p:nvSpPr>
+        <p:spPr>
+          <a:xfrm>
+            <a:off x="548640" y="3729288"/>
+            <a:ext cx="11094300" cy="91500"/>
+          </a:xfrm>
+          <a:prstGeom prst="rect">
+            <a:avLst/>
+          </a:prstGeom>
+          <a:solidFill>
+            <a:srgbClr val="0F9B8E"/>
+          </a:solidFill>
+          <a:ln>
+            <a:noFill/>
+          </a:ln>
+        </p:spPr>
+        <p:txBody>
+          <a:bodyPr anchorCtr="0" anchor="ctr" bIns="45700" lIns="91425" spcFirstLastPara="1" rIns="91425" wrap="square" tIns="45700">
+            <a:noAutofit/>
+          </a:bodyPr>
+          <a:lstStyle/>
+          <a:p>
+            <a:pPr indent="0" lvl="0" marL="0" marR="0" rtl="0" algn="ctr">
+              <a:spcBef>
+                <a:spcPts val="0"/>
+              </a:spcBef>
+              <a:spcAft>
+                <a:spcPts val="0"/>
+              </a:spcAft>
+              <a:buNone/>
+            </a:pPr>
+            <a:r>
+              <a:t/>
+            </a:r>
+            <a:endParaRPr sz="1800">
+              <a:solidFill>
+                <a:schemeClr val="lt1"/>
+              </a:solidFill>
+              <a:latin typeface="Calibri"/>
+              <a:ea typeface="Calibri"/>
+              <a:cs typeface="Calibri"/>
+              <a:sym typeface="Calibri"/>
+            </a:endParaRPr>
+          </a:p>
+        </p:txBody>
+      </p:sp>
+      <p:sp>
+        <p:nvSpPr>
+          <p:cNvPr id="189" name="Google Shape;189;p5"/>
+          <p:cNvSpPr txBox="1"/>
+          <p:nvPr/>
+        </p:nvSpPr>
+        <p:spPr>
+          <a:xfrm>
+            <a:off x="731520" y="3866448"/>
+            <a:ext cx="10820100" cy="1631700"/>
+          </a:xfrm>
+          <a:prstGeom prst="rect">
+            <a:avLst/>
+          </a:prstGeom>
+          <a:noFill/>
+          <a:ln>
+            <a:noFill/>
+          </a:ln>
+        </p:spPr>
+        <p:txBody>
+          <a:bodyPr anchorCtr="0" anchor="t" bIns="45700" lIns="91425" spcFirstLastPara="1" rIns="91425" wrap="square" tIns="45700">
+            <a:spAutoFit/>
+          </a:bodyPr>
+          <a:lstStyle/>
+          <a:p>
+            <a:pPr indent="0" lvl="0" marL="0" marR="0" rtl="0" algn="l">
+              <a:spcBef>
+                <a:spcPts val="0"/>
+              </a:spcBef>
+              <a:spcAft>
+                <a:spcPts val="0"/>
+              </a:spcAft>
+              <a:buNone/>
+            </a:pPr>
+            <a:r>
+              <a:rPr b="0" lang="en-US" sz="2000">
+                <a:solidFill>
+                  <a:srgbClr val="4ADFCB"/>
+                </a:solidFill>
+                <a:latin typeface="Consolas"/>
+                <a:ea typeface="Consolas"/>
+                <a:cs typeface="Consolas"/>
+                <a:sym typeface="Consolas"/>
+              </a:rPr>
+              <a:t>  for numero_partido in range(1, 5):</a:t>
+            </a:r>
+            <a:endParaRPr b="0" sz="2000">
+              <a:solidFill>
+                <a:srgbClr val="4ADFCB"/>
+              </a:solidFill>
+              <a:latin typeface="Consolas"/>
+              <a:ea typeface="Consolas"/>
+              <a:cs typeface="Consolas"/>
+              <a:sym typeface="Consolas"/>
+            </a:endParaRPr>
+          </a:p>
+          <a:p>
+            <a:pPr indent="0" lvl="0" marL="0" marR="0" rtl="0" algn="l">
+              <a:spcBef>
+                <a:spcPts val="0"/>
+              </a:spcBef>
+              <a:spcAft>
+                <a:spcPts val="0"/>
+              </a:spcAft>
+              <a:buNone/>
+            </a:pPr>
+            <a:r>
+              <a:rPr lang="en-US" sz="2000">
+                <a:solidFill>
+                  <a:srgbClr val="4ADFCB"/>
+                </a:solidFill>
+                <a:latin typeface="Consolas"/>
+                <a:ea typeface="Consolas"/>
+                <a:cs typeface="Consolas"/>
+                <a:sym typeface="Consolas"/>
+              </a:rPr>
+              <a:t>      </a:t>
+            </a:r>
+            <a:r>
+              <a:rPr b="1" lang="en-US" sz="2000">
+                <a:solidFill>
+                  <a:srgbClr val="F5A623"/>
+                </a:solidFill>
+                <a:latin typeface="Consolas"/>
+                <a:ea typeface="Consolas"/>
+                <a:cs typeface="Consolas"/>
+                <a:sym typeface="Consolas"/>
+              </a:rPr>
+              <a:t>goles_totales = 0</a:t>
+            </a:r>
+            <a:endParaRPr b="1" sz="2000">
+              <a:solidFill>
+                <a:srgbClr val="F5A623"/>
+              </a:solidFill>
+              <a:latin typeface="Consolas"/>
+              <a:ea typeface="Consolas"/>
+              <a:cs typeface="Consolas"/>
+              <a:sym typeface="Consolas"/>
+            </a:endParaRPr>
           </a:p>
           <a:p>
             <a:pPr indent="0" lvl="0" marL="0" marR="0" rtl="0" algn="l">
@@ -16774,14 +18888,14 @@
       </p:sp>
       <p:sp>
         <p:nvSpPr>
-          <p:cNvPr id="173" name="Google Shape;173;p5"/>
+          <p:cNvPr id="190" name="Google Shape;190;p5"/>
           <p:cNvSpPr/>
           <p:nvPr/>
         </p:nvSpPr>
         <p:spPr>
           <a:xfrm>
             <a:off x="548640" y="5824362"/>
-            <a:ext cx="11094415" cy="759317"/>
+            <a:ext cx="11094300" cy="759300"/>
           </a:xfrm>
           <a:prstGeom prst="rect">
             <a:avLst/>
@@ -16825,14 +18939,14 @@
       </p:sp>
       <p:sp>
         <p:nvSpPr>
-          <p:cNvPr id="174" name="Google Shape;174;p5"/>
+          <p:cNvPr id="191" name="Google Shape;191;p5"/>
           <p:cNvSpPr/>
           <p:nvPr/>
         </p:nvSpPr>
         <p:spPr>
           <a:xfrm>
             <a:off x="548640" y="5824362"/>
-            <a:ext cx="73152" cy="759317"/>
+            <a:ext cx="73200" cy="759300"/>
           </a:xfrm>
           <a:prstGeom prst="rect">
             <a:avLst/>
@@ -16876,14 +18990,14 @@
       </p:sp>
       <p:sp>
         <p:nvSpPr>
-          <p:cNvPr id="175" name="Google Shape;175;p5"/>
+          <p:cNvPr id="192" name="Google Shape;192;p5"/>
           <p:cNvSpPr txBox="1"/>
           <p:nvPr/>
         </p:nvSpPr>
         <p:spPr>
           <a:xfrm>
-            <a:off x="777240" y="5897514"/>
-            <a:ext cx="10728655" cy="347472"/>
+            <a:off x="777240" y="5764927"/>
+            <a:ext cx="10728600" cy="369300"/>
           </a:xfrm>
           <a:prstGeom prst="rect">
             <a:avLst/>
@@ -16926,14 +19040,14 @@
       </p:sp>
       <p:sp>
         <p:nvSpPr>
-          <p:cNvPr id="176" name="Google Shape;176;p5"/>
+          <p:cNvPr id="193" name="Google Shape;193;p5"/>
           <p:cNvSpPr txBox="1"/>
           <p:nvPr/>
         </p:nvSpPr>
         <p:spPr>
           <a:xfrm>
-            <a:off x="777240" y="6217554"/>
-            <a:ext cx="10728655" cy="320405"/>
+            <a:off x="777240" y="5995629"/>
+            <a:ext cx="10728600" cy="769500"/>
           </a:xfrm>
           <a:prstGeom prst="rect">
             <a:avLst/>
@@ -16968,7 +19082,31 @@
                 <a:cs typeface="Calibri"/>
                 <a:sym typeface="Calibri"/>
               </a:rPr>
-              <a:t>si la variable acumuladora se inicializa DENTRO del bucle, se reinicia en cada vuelta y nunca acumula de verdad.</a:t>
+              <a:t>si la variable acumuladora se inicializa </a:t>
+            </a:r>
+            <a:r>
+              <a:rPr b="1" lang="en-US" sz="2200">
+                <a:solidFill>
+                  <a:srgbClr val="F5A623"/>
+                </a:solidFill>
+                <a:latin typeface="Calibri"/>
+                <a:ea typeface="Calibri"/>
+                <a:cs typeface="Calibri"/>
+                <a:sym typeface="Calibri"/>
+              </a:rPr>
+              <a:t>DENTRO del bucle, se reinicia</a:t>
+            </a:r>
+            <a:r>
+              <a:rPr b="0" lang="en-US" sz="2200">
+                <a:solidFill>
+                  <a:srgbClr val="FFFFFF"/>
+                </a:solidFill>
+                <a:latin typeface="Calibri"/>
+                <a:ea typeface="Calibri"/>
+                <a:cs typeface="Calibri"/>
+                <a:sym typeface="Calibri"/>
+              </a:rPr>
+              <a:t> en cada vuelta y nunca acumula de verdad.</a:t>
             </a:r>
             <a:endParaRPr/>
           </a:p>
@@ -16982,12 +19120,12 @@
 </p:sld>
 </file>
 
-<file path=ppt/slides/slide8.xml><?xml version="1.0" encoding="utf-8"?>
+<file path=ppt/slides/slide9.xml><?xml version="1.0" encoding="utf-8"?>
 <p:sld xmlns:a="http://schemas.openxmlformats.org/drawingml/2006/main" xmlns:r="http://schemas.openxmlformats.org/officeDocument/2006/relationships" xmlns:mc="http://schemas.openxmlformats.org/markup-compatibility/2006" xmlns:mv="urn:schemas-microsoft-com:mac:vml" xmlns:p="http://schemas.openxmlformats.org/presentationml/2006/main" xmlns:c="http://schemas.openxmlformats.org/drawingml/2006/chart" xmlns:dgm="http://schemas.openxmlformats.org/drawingml/2006/diagram" xmlns:o="urn:schemas-microsoft-com:office:office" xmlns:v="urn:schemas-microsoft-com:vml" xmlns:pvml="urn:schemas-microsoft-com:office:powerpoint" xmlns:com="http://schemas.openxmlformats.org/drawingml/2006/compatibility" xmlns:p14="http://schemas.microsoft.com/office/powerpoint/2010/main" xmlns:p15="http://schemas.microsoft.com/office/powerpoint/2012/main" xmlns:ahyp="http://schemas.microsoft.com/office/drawing/2018/hyperlinkcolor">
   <p:cSld>
     <p:spTree>
       <p:nvGrpSpPr>
-        <p:cNvPr id="180" name="Shape 180"/>
+        <p:cNvPr id="197" name="Shape 197"/>
         <p:cNvGrpSpPr/>
         <p:nvPr/>
       </p:nvGrpSpPr>
@@ -17001,7 +19139,7 @@
       </p:grpSpPr>
       <p:sp>
         <p:nvSpPr>
-          <p:cNvPr id="181" name="Google Shape;181;p6"/>
+          <p:cNvPr id="198" name="Google Shape;198;p6"/>
           <p:cNvSpPr/>
           <p:nvPr/>
         </p:nvSpPr>
@@ -17052,7 +19190,7 @@
       </p:sp>
       <p:sp>
         <p:nvSpPr>
-          <p:cNvPr id="182" name="Google Shape;182;p6"/>
+          <p:cNvPr id="199" name="Google Shape;199;p6"/>
           <p:cNvSpPr/>
           <p:nvPr/>
         </p:nvSpPr>
@@ -17103,7 +19241,7 @@
       </p:sp>
       <p:sp>
         <p:nvSpPr>
-          <p:cNvPr id="183" name="Google Shape;183;p6"/>
+          <p:cNvPr id="200" name="Google Shape;200;p6"/>
           <p:cNvSpPr txBox="1"/>
           <p:nvPr/>
         </p:nvSpPr>
@@ -17153,7 +19291,7 @@
       </p:sp>
       <p:sp>
         <p:nvSpPr>
-          <p:cNvPr id="184" name="Google Shape;184;p6"/>
+          <p:cNvPr id="201" name="Google Shape;201;p6"/>
           <p:cNvSpPr txBox="1"/>
           <p:nvPr/>
         </p:nvSpPr>
@@ -17203,7 +19341,7 @@
       </p:sp>
       <p:sp>
         <p:nvSpPr>
-          <p:cNvPr id="185" name="Google Shape;185;p6"/>
+          <p:cNvPr id="202" name="Google Shape;202;p6"/>
           <p:cNvSpPr txBox="1"/>
           <p:nvPr/>
         </p:nvSpPr>
@@ -17253,7 +19391,7 @@
       </p:sp>
       <p:graphicFrame>
         <p:nvGraphicFramePr>
-          <p:cNvPr id="186" name="Google Shape;186;p6"/>
+          <p:cNvPr id="203" name="Google Shape;203;p6"/>
           <p:cNvGraphicFramePr/>
           <p:nvPr/>
         </p:nvGraphicFramePr>
@@ -17266,7 +19404,7 @@
             <a:tbl>
               <a:tblPr bandRow="1" firstRow="1">
                 <a:noFill/>
-                <a:tableStyleId>{3E3F2A8C-4A7E-457A-9F59-DACFF1834618}</a:tableStyleId>
+                <a:tableStyleId>{1EE275E9-B3DF-4A07-940A-6F7083ACD9C3}</a:tableStyleId>
               </a:tblPr>
               <a:tblGrid>
                 <a:gridCol w="3200400"/>
@@ -17827,7 +19965,7 @@
       </p:graphicFrame>
       <p:sp>
         <p:nvSpPr>
-          <p:cNvPr id="187" name="Google Shape;187;p6"/>
+          <p:cNvPr id="204" name="Google Shape;204;p6"/>
           <p:cNvSpPr/>
           <p:nvPr/>
         </p:nvSpPr>
@@ -17878,7 +20016,7 @@
       </p:sp>
       <p:sp>
         <p:nvSpPr>
-          <p:cNvPr id="188" name="Google Shape;188;p6"/>
+          <p:cNvPr id="205" name="Google Shape;205;p6"/>
           <p:cNvSpPr/>
           <p:nvPr/>
         </p:nvSpPr>
@@ -17929,7 +20067,7 @@
       </p:sp>
       <p:sp>
         <p:nvSpPr>
-          <p:cNvPr id="189" name="Google Shape;189;p6"/>
+          <p:cNvPr id="206" name="Google Shape;206;p6"/>
           <p:cNvSpPr txBox="1"/>
           <p:nvPr/>
         </p:nvSpPr>
@@ -17985,733 +20123,286 @@
 </p:sld>
 </file>
 
-<file path=ppt/slides/slide9.xml><?xml version="1.0" encoding="utf-8"?>
-<p:sld xmlns:a="http://schemas.openxmlformats.org/drawingml/2006/main" xmlns:r="http://schemas.openxmlformats.org/officeDocument/2006/relationships" xmlns:mc="http://schemas.openxmlformats.org/markup-compatibility/2006" xmlns:mv="urn:schemas-microsoft-com:mac:vml" xmlns:p="http://schemas.openxmlformats.org/presentationml/2006/main" xmlns:c="http://schemas.openxmlformats.org/drawingml/2006/chart" xmlns:dgm="http://schemas.openxmlformats.org/drawingml/2006/diagram" xmlns:o="urn:schemas-microsoft-com:office:office" xmlns:v="urn:schemas-microsoft-com:vml" xmlns:pvml="urn:schemas-microsoft-com:office:powerpoint" xmlns:com="http://schemas.openxmlformats.org/drawingml/2006/compatibility" xmlns:p14="http://schemas.microsoft.com/office/powerpoint/2010/main" xmlns:p15="http://schemas.microsoft.com/office/powerpoint/2012/main" xmlns:ahyp="http://schemas.microsoft.com/office/drawing/2018/hyperlinkcolor">
-  <p:cSld>
-    <p:spTree>
-      <p:nvGrpSpPr>
-        <p:cNvPr id="193" name="Shape 193"/>
-        <p:cNvGrpSpPr/>
-        <p:nvPr/>
-      </p:nvGrpSpPr>
-      <p:grpSpPr>
-        <a:xfrm>
-          <a:off x="0" y="0"/>
-          <a:ext cx="0" cy="0"/>
-          <a:chOff x="0" y="0"/>
-          <a:chExt cx="0" cy="0"/>
-        </a:xfrm>
-      </p:grpSpPr>
-      <p:sp>
-        <p:nvSpPr>
-          <p:cNvPr id="194" name="Google Shape;194;p7"/>
-          <p:cNvSpPr/>
-          <p:nvPr/>
-        </p:nvSpPr>
-        <p:spPr>
-          <a:xfrm>
-            <a:off x="0" y="0"/>
-            <a:ext cx="12191695" cy="6858000"/>
-          </a:xfrm>
-          <a:prstGeom prst="rect">
-            <a:avLst/>
-          </a:prstGeom>
+<file path=ppt/theme/theme1.xml><?xml version="1.0" encoding="utf-8"?>
+<a:theme xmlns:a="http://schemas.openxmlformats.org/drawingml/2006/main" xmlns:r="http://schemas.openxmlformats.org/officeDocument/2006/relationships">
+  <a:themeElements>
+    <a:clrScheme name="Default">
+      <a:dk1>
+        <a:srgbClr val="000000"/>
+      </a:dk1>
+      <a:lt1>
+        <a:srgbClr val="FFFFFF"/>
+      </a:lt1>
+      <a:dk2>
+        <a:srgbClr val="158158"/>
+      </a:dk2>
+      <a:lt2>
+        <a:srgbClr val="F3F3F3"/>
+      </a:lt2>
+      <a:accent1>
+        <a:srgbClr val="058DC7"/>
+      </a:accent1>
+      <a:accent2>
+        <a:srgbClr val="50B432"/>
+      </a:accent2>
+      <a:accent3>
+        <a:srgbClr val="ED561B"/>
+      </a:accent3>
+      <a:accent4>
+        <a:srgbClr val="EDEF00"/>
+      </a:accent4>
+      <a:accent5>
+        <a:srgbClr val="24CBE5"/>
+      </a:accent5>
+      <a:accent6>
+        <a:srgbClr val="64E572"/>
+      </a:accent6>
+      <a:hlink>
+        <a:srgbClr val="2200CC"/>
+      </a:hlink>
+      <a:folHlink>
+        <a:srgbClr val="551A8B"/>
+      </a:folHlink>
+    </a:clrScheme>
+    <a:fontScheme name="Office">
+      <a:majorFont>
+        <a:latin typeface="Arial"/>
+        <a:ea typeface=""/>
+        <a:cs typeface=""/>
+        <a:font script="Jpan" typeface="ＭＳ Ｐゴシック"/>
+        <a:font script="Hang" typeface="맑은 고딕"/>
+        <a:font script="Hans" typeface="宋体"/>
+        <a:font script="Hant" typeface="新細明體"/>
+        <a:font script="Arab" typeface="Times New Roman"/>
+        <a:font script="Hebr" typeface="Times New Roman"/>
+        <a:font script="Thai" typeface="Angsana New"/>
+        <a:font script="Ethi" typeface="Nyala"/>
+        <a:font script="Beng" typeface="Vrinda"/>
+        <a:font script="Gujr" typeface="Shruti"/>
+        <a:font script="Khmr" typeface="MoolBoran"/>
+        <a:font script="Knda" typeface="Tunga"/>
+        <a:font script="Guru" typeface="Raavi"/>
+        <a:font script="Cans" typeface="Euphemia"/>
+        <a:font script="Cher" typeface="Plantagenet Cherokee"/>
+        <a:font script="Yiii" typeface="Microsoft Yi Baiti"/>
+        <a:font script="Tibt" typeface="Microsoft Himalaya"/>
+        <a:font script="Thaa" typeface="MV Boli"/>
+        <a:font script="Deva" typeface="Mangal"/>
+        <a:font script="Telu" typeface="Gautami"/>
+        <a:font script="Taml" typeface="Latha"/>
+        <a:font script="Syrc" typeface="Estrangelo Edessa"/>
+        <a:font script="Orya" typeface="Kalinga"/>
+        <a:font script="Mlym" typeface="Kartika"/>
+        <a:font script="Laoo" typeface="DokChampa"/>
+        <a:font script="Sinh" typeface="Iskoola Pota"/>
+        <a:font script="Mong" typeface="Mongolian Baiti"/>
+        <a:font script="Viet" typeface="Times New Roman"/>
+        <a:font script="Uigh" typeface="Microsoft Uighur"/>
+        <a:font script="Geor" typeface="Sylfaen"/>
+      </a:majorFont>
+      <a:minorFont>
+        <a:latin typeface="Arial"/>
+        <a:ea typeface=""/>
+        <a:cs typeface=""/>
+        <a:font script="Jpan" typeface="ＭＳ Ｐゴシック"/>
+        <a:font script="Hang" typeface="맑은 고딕"/>
+        <a:font script="Hans" typeface="宋体"/>
+        <a:font script="Hant" typeface="新細明體"/>
+        <a:font script="Arab" typeface="Arial"/>
+        <a:font script="Hebr" typeface="Arial"/>
+        <a:font script="Thai" typeface="Cordia New"/>
+        <a:font script="Ethi" typeface="Nyala"/>
+        <a:font script="Beng" typeface="Vrinda"/>
+        <a:font script="Gujr" typeface="Shruti"/>
+        <a:font script="Khmr" typeface="DaunPenh"/>
+        <a:font script="Knda" typeface="Tunga"/>
+        <a:font script="Guru" typeface="Raavi"/>
+        <a:font script="Cans" typeface="Euphemia"/>
+        <a:font script="Cher" typeface="Plantagenet Cherokee"/>
+        <a:font script="Yiii" typeface="Microsoft Yi Baiti"/>
+        <a:font script="Tibt" typeface="Microsoft Himalaya"/>
+        <a:font script="Thaa" typeface="MV Boli"/>
+        <a:font script="Deva" typeface="Mangal"/>
+        <a:font script="Telu" typeface="Gautami"/>
+        <a:font script="Taml" typeface="Latha"/>
+        <a:font script="Syrc" typeface="Estrangelo Edessa"/>
+        <a:font script="Orya" typeface="Kalinga"/>
+        <a:font script="Mlym" typeface="Kartika"/>
+        <a:font script="Laoo" typeface="DokChampa"/>
+        <a:font script="Sinh" typeface="Iskoola Pota"/>
+        <a:font script="Mong" typeface="Mongolian Baiti"/>
+        <a:font script="Viet" typeface="Arial"/>
+        <a:font script="Uigh" typeface="Microsoft Uighur"/>
+        <a:font script="Geor" typeface="Sylfaen"/>
+      </a:minorFont>
+    </a:fontScheme>
+    <a:fmtScheme name="Office">
+      <a:fillStyleLst>
+        <a:solidFill>
+          <a:schemeClr val="phClr"/>
+        </a:solidFill>
+        <a:gradFill rotWithShape="1">
+          <a:gsLst>
+            <a:gs pos="0">
+              <a:schemeClr val="phClr">
+                <a:tint val="50000"/>
+                <a:satMod val="300000"/>
+              </a:schemeClr>
+            </a:gs>
+            <a:gs pos="35000">
+              <a:schemeClr val="phClr">
+                <a:tint val="37000"/>
+                <a:satMod val="300000"/>
+              </a:schemeClr>
+            </a:gs>
+            <a:gs pos="100000">
+              <a:schemeClr val="phClr">
+                <a:tint val="15000"/>
+                <a:satMod val="350000"/>
+              </a:schemeClr>
+            </a:gs>
+          </a:gsLst>
+          <a:lin ang="16200000" scaled="1"/>
+        </a:gradFill>
+        <a:gradFill rotWithShape="1">
+          <a:gsLst>
+            <a:gs pos="0">
+              <a:schemeClr val="phClr">
+                <a:tint val="100000"/>
+                <a:shade val="100000"/>
+                <a:satMod val="130000"/>
+              </a:schemeClr>
+            </a:gs>
+            <a:gs pos="100000">
+              <a:schemeClr val="phClr">
+                <a:tint val="50000"/>
+                <a:shade val="100000"/>
+                <a:satMod val="350000"/>
+              </a:schemeClr>
+            </a:gs>
+          </a:gsLst>
+          <a:lin ang="16200000" scaled="0"/>
+        </a:gradFill>
+      </a:fillStyleLst>
+      <a:lnStyleLst>
+        <a:ln w="9525" cap="flat" cmpd="sng" algn="ctr">
           <a:solidFill>
-            <a:srgbClr val="1A1A2E"/>
+            <a:schemeClr val="phClr">
+              <a:shade val="95000"/>
+              <a:satMod val="105000"/>
+            </a:schemeClr>
           </a:solidFill>
-          <a:ln>
-            <a:noFill/>
-          </a:ln>
-        </p:spPr>
-        <p:txBody>
-          <a:bodyPr anchorCtr="0" anchor="ctr" bIns="45700" lIns="91425" spcFirstLastPara="1" rIns="91425" wrap="square" tIns="45700">
-            <a:noAutofit/>
-          </a:bodyPr>
-          <a:lstStyle/>
-          <a:p>
-            <a:pPr indent="0" lvl="0" marL="0" marR="0" rtl="0" algn="ctr">
-              <a:spcBef>
-                <a:spcPts val="0"/>
-              </a:spcBef>
-              <a:spcAft>
-                <a:spcPts val="0"/>
-              </a:spcAft>
-              <a:buNone/>
-            </a:pPr>
-            <a:r>
-              <a:t/>
-            </a:r>
-            <a:endParaRPr sz="1800">
-              <a:solidFill>
-                <a:schemeClr val="lt1"/>
-              </a:solidFill>
-              <a:latin typeface="Calibri"/>
-              <a:ea typeface="Calibri"/>
-              <a:cs typeface="Calibri"/>
-              <a:sym typeface="Calibri"/>
-            </a:endParaRPr>
-          </a:p>
-        </p:txBody>
-      </p:sp>
-      <p:sp>
-        <p:nvSpPr>
-          <p:cNvPr id="195" name="Google Shape;195;p7"/>
-          <p:cNvSpPr txBox="1"/>
-          <p:nvPr/>
-        </p:nvSpPr>
-        <p:spPr>
-          <a:xfrm>
-            <a:off x="548640" y="411480"/>
-            <a:ext cx="11094415" cy="640080"/>
-          </a:xfrm>
-          <a:prstGeom prst="rect">
-            <a:avLst/>
-          </a:prstGeom>
-          <a:noFill/>
-          <a:ln>
-            <a:noFill/>
-          </a:ln>
-        </p:spPr>
-        <p:txBody>
-          <a:bodyPr anchorCtr="0" anchor="t" bIns="45700" lIns="91425" spcFirstLastPara="1" rIns="91425" wrap="square" tIns="45700">
-            <a:spAutoFit/>
-          </a:bodyPr>
-          <a:lstStyle/>
-          <a:p>
-            <a:pPr indent="0" lvl="0" marL="0" marR="0" rtl="0" algn="l">
-              <a:spcBef>
-                <a:spcPts val="0"/>
-              </a:spcBef>
-              <a:spcAft>
-                <a:spcPts val="0"/>
-              </a:spcAft>
-              <a:buNone/>
-            </a:pPr>
-            <a:r>
-              <a:rPr b="1" lang="en-US" sz="3600">
-                <a:solidFill>
-                  <a:srgbClr val="FFFFFF"/>
-                </a:solidFill>
-                <a:latin typeface="Calibri"/>
-                <a:ea typeface="Calibri"/>
-                <a:cs typeface="Calibri"/>
-                <a:sym typeface="Calibri"/>
-              </a:rPr>
-              <a:t>Cierre</a:t>
-            </a:r>
-            <a:endParaRPr/>
-          </a:p>
-        </p:txBody>
-      </p:sp>
-      <p:sp>
-        <p:nvSpPr>
-          <p:cNvPr id="196" name="Google Shape;196;p7"/>
-          <p:cNvSpPr/>
-          <p:nvPr/>
-        </p:nvSpPr>
-        <p:spPr>
-          <a:xfrm>
-            <a:off x="548640" y="1051560"/>
-            <a:ext cx="1188720" cy="54864"/>
-          </a:xfrm>
-          <a:prstGeom prst="rect">
-            <a:avLst/>
-          </a:prstGeom>
+          <a:prstDash val="solid"/>
+        </a:ln>
+        <a:ln w="25400" cap="flat" cmpd="sng" algn="ctr">
           <a:solidFill>
-            <a:srgbClr val="F5A623"/>
+            <a:schemeClr val="phClr"/>
           </a:solidFill>
-          <a:ln>
-            <a:noFill/>
-          </a:ln>
-        </p:spPr>
-        <p:txBody>
-          <a:bodyPr anchorCtr="0" anchor="ctr" bIns="45700" lIns="91425" spcFirstLastPara="1" rIns="91425" wrap="square" tIns="45700">
-            <a:noAutofit/>
-          </a:bodyPr>
-          <a:lstStyle/>
-          <a:p>
-            <a:pPr indent="0" lvl="0" marL="0" marR="0" rtl="0" algn="ctr">
-              <a:spcBef>
-                <a:spcPts val="0"/>
-              </a:spcBef>
-              <a:spcAft>
-                <a:spcPts val="0"/>
-              </a:spcAft>
-              <a:buNone/>
-            </a:pPr>
-            <a:r>
-              <a:t/>
-            </a:r>
-            <a:endParaRPr sz="1800">
-              <a:solidFill>
-                <a:schemeClr val="lt1"/>
-              </a:solidFill>
-              <a:latin typeface="Calibri"/>
-              <a:ea typeface="Calibri"/>
-              <a:cs typeface="Calibri"/>
-              <a:sym typeface="Calibri"/>
-            </a:endParaRPr>
-          </a:p>
-        </p:txBody>
-      </p:sp>
-      <p:sp>
-        <p:nvSpPr>
-          <p:cNvPr id="197" name="Google Shape;197;p7"/>
-          <p:cNvSpPr/>
-          <p:nvPr/>
-        </p:nvSpPr>
-        <p:spPr>
-          <a:xfrm>
-            <a:off x="548640" y="1325880"/>
-            <a:ext cx="11094415" cy="1417320"/>
-          </a:xfrm>
-          <a:prstGeom prst="rect">
-            <a:avLst/>
-          </a:prstGeom>
+          <a:prstDash val="solid"/>
+        </a:ln>
+        <a:ln w="38100" cap="flat" cmpd="sng" algn="ctr">
           <a:solidFill>
-            <a:srgbClr val="0F162A"/>
+            <a:schemeClr val="phClr"/>
           </a:solidFill>
-          <a:ln>
-            <a:noFill/>
-          </a:ln>
-        </p:spPr>
-        <p:txBody>
-          <a:bodyPr anchorCtr="0" anchor="ctr" bIns="45700" lIns="91425" spcFirstLastPara="1" rIns="91425" wrap="square" tIns="45700">
-            <a:noAutofit/>
-          </a:bodyPr>
-          <a:lstStyle/>
-          <a:p>
-            <a:pPr indent="0" lvl="0" marL="0" marR="0" rtl="0" algn="ctr">
-              <a:spcBef>
-                <a:spcPts val="0"/>
-              </a:spcBef>
-              <a:spcAft>
-                <a:spcPts val="0"/>
-              </a:spcAft>
-              <a:buNone/>
-            </a:pPr>
-            <a:r>
-              <a:t/>
-            </a:r>
-            <a:endParaRPr sz="1800">
-              <a:solidFill>
-                <a:schemeClr val="lt1"/>
-              </a:solidFill>
-              <a:latin typeface="Calibri"/>
-              <a:ea typeface="Calibri"/>
-              <a:cs typeface="Calibri"/>
-              <a:sym typeface="Calibri"/>
-            </a:endParaRPr>
-          </a:p>
-        </p:txBody>
-      </p:sp>
-      <p:sp>
-        <p:nvSpPr>
-          <p:cNvPr id="198" name="Google Shape;198;p7"/>
-          <p:cNvSpPr txBox="1"/>
-          <p:nvPr/>
-        </p:nvSpPr>
-        <p:spPr>
-          <a:xfrm>
-            <a:off x="777240" y="1463039"/>
-            <a:ext cx="1463040" cy="365760"/>
-          </a:xfrm>
-          <a:prstGeom prst="rect">
-            <a:avLst/>
-          </a:prstGeom>
-          <a:noFill/>
-          <a:ln>
-            <a:noFill/>
-          </a:ln>
-        </p:spPr>
-        <p:txBody>
-          <a:bodyPr anchorCtr="0" anchor="t" bIns="45700" lIns="91425" spcFirstLastPara="1" rIns="91425" wrap="square" tIns="45700">
-            <a:spAutoFit/>
-          </a:bodyPr>
-          <a:lstStyle/>
-          <a:p>
-            <a:pPr indent="0" lvl="0" marL="0" marR="0" rtl="0" algn="l">
-              <a:spcBef>
-                <a:spcPts val="0"/>
-              </a:spcBef>
-              <a:spcAft>
-                <a:spcPts val="0"/>
-              </a:spcAft>
-              <a:buNone/>
-            </a:pPr>
-            <a:r>
-              <a:rPr b="1" lang="en-US" sz="1600">
-                <a:solidFill>
-                  <a:srgbClr val="F5A623"/>
-                </a:solidFill>
-                <a:latin typeface="Calibri"/>
-                <a:ea typeface="Calibri"/>
-                <a:cs typeface="Calibri"/>
-                <a:sym typeface="Calibri"/>
-              </a:rPr>
-              <a:t>Objetivo</a:t>
-            </a:r>
-            <a:endParaRPr/>
-          </a:p>
-        </p:txBody>
-      </p:sp>
-      <p:sp>
-        <p:nvSpPr>
-          <p:cNvPr id="199" name="Google Shape;199;p7"/>
-          <p:cNvSpPr txBox="1"/>
-          <p:nvPr/>
-        </p:nvSpPr>
-        <p:spPr>
-          <a:xfrm>
-            <a:off x="2331720" y="1463039"/>
-            <a:ext cx="9082735" cy="1143000"/>
-          </a:xfrm>
-          <a:prstGeom prst="rect">
-            <a:avLst/>
-          </a:prstGeom>
-          <a:noFill/>
-          <a:ln>
-            <a:noFill/>
-          </a:ln>
-        </p:spPr>
-        <p:txBody>
-          <a:bodyPr anchorCtr="0" anchor="t" bIns="45700" lIns="91425" spcFirstLastPara="1" rIns="91425" wrap="square" tIns="45700">
-            <a:normAutofit/>
-          </a:bodyPr>
-          <a:lstStyle/>
-          <a:p>
-            <a:pPr indent="0" lvl="0" marL="0" marR="0" rtl="0" algn="l">
-              <a:spcBef>
-                <a:spcPts val="0"/>
-              </a:spcBef>
-              <a:spcAft>
-                <a:spcPts val="0"/>
-              </a:spcAft>
-              <a:buNone/>
-            </a:pPr>
-            <a:r>
-              <a:rPr b="0" lang="en-US" sz="2200">
-                <a:solidFill>
-                  <a:srgbClr val="FFFFFF"/>
-                </a:solidFill>
-                <a:latin typeface="Calibri"/>
-                <a:ea typeface="Calibri"/>
-                <a:cs typeface="Calibri"/>
-                <a:sym typeface="Calibri"/>
-              </a:rPr>
-              <a:t>Construir programas en Python que utilicen la sentencia </a:t>
-            </a:r>
-            <a:r>
-              <a:rPr b="0" lang="en-US" sz="2200">
-                <a:solidFill>
-                  <a:srgbClr val="4ADFCB"/>
-                </a:solidFill>
-                <a:latin typeface="Consolas"/>
-                <a:ea typeface="Consolas"/>
-                <a:cs typeface="Consolas"/>
-                <a:sym typeface="Consolas"/>
-              </a:rPr>
-              <a:t>for</a:t>
-            </a:r>
-            <a:r>
-              <a:rPr b="0" lang="en-US" sz="2200">
-                <a:solidFill>
-                  <a:srgbClr val="FFFFFF"/>
-                </a:solidFill>
-                <a:latin typeface="Calibri"/>
-                <a:ea typeface="Calibri"/>
-                <a:cs typeface="Calibri"/>
-                <a:sym typeface="Calibri"/>
-              </a:rPr>
-              <a:t> y la función </a:t>
-            </a:r>
-            <a:r>
-              <a:rPr b="0" lang="en-US" sz="2200">
-                <a:solidFill>
-                  <a:srgbClr val="4ADFCB"/>
-                </a:solidFill>
-                <a:latin typeface="Consolas"/>
-                <a:ea typeface="Consolas"/>
-                <a:cs typeface="Consolas"/>
-                <a:sym typeface="Consolas"/>
-              </a:rPr>
-              <a:t>range()</a:t>
-            </a:r>
-            <a:r>
-              <a:rPr b="0" lang="en-US" sz="2200">
-                <a:solidFill>
-                  <a:srgbClr val="FFFFFF"/>
-                </a:solidFill>
-                <a:latin typeface="Calibri"/>
-                <a:ea typeface="Calibri"/>
-                <a:cs typeface="Calibri"/>
-                <a:sym typeface="Calibri"/>
-              </a:rPr>
-              <a:t> para repetir instrucciones y generar secuencias numéricas controladas, con orden.</a:t>
-            </a:r>
-            <a:endParaRPr sz="1900"/>
-          </a:p>
-        </p:txBody>
-      </p:sp>
-      <p:sp>
-        <p:nvSpPr>
-          <p:cNvPr id="200" name="Google Shape;200;p7"/>
-          <p:cNvSpPr/>
-          <p:nvPr/>
-        </p:nvSpPr>
-        <p:spPr>
-          <a:xfrm>
-            <a:off x="548640" y="3017520"/>
-            <a:ext cx="5387187" cy="3429000"/>
-          </a:xfrm>
-          <a:prstGeom prst="rect">
-            <a:avLst/>
-          </a:prstGeom>
-          <a:solidFill>
-            <a:srgbClr val="0F2A43"/>
-          </a:solidFill>
-          <a:ln>
-            <a:noFill/>
-          </a:ln>
-        </p:spPr>
-        <p:txBody>
-          <a:bodyPr anchorCtr="0" anchor="ctr" bIns="45700" lIns="91425" spcFirstLastPara="1" rIns="91425" wrap="square" tIns="45700">
-            <a:noAutofit/>
-          </a:bodyPr>
-          <a:lstStyle/>
-          <a:p>
-            <a:pPr indent="0" lvl="0" marL="0" marR="0" rtl="0" algn="ctr">
-              <a:spcBef>
-                <a:spcPts val="0"/>
-              </a:spcBef>
-              <a:spcAft>
-                <a:spcPts val="0"/>
-              </a:spcAft>
-              <a:buNone/>
-            </a:pPr>
-            <a:r>
-              <a:t/>
-            </a:r>
-            <a:endParaRPr sz="1800">
-              <a:solidFill>
-                <a:schemeClr val="lt1"/>
-              </a:solidFill>
-              <a:latin typeface="Calibri"/>
-              <a:ea typeface="Calibri"/>
-              <a:cs typeface="Calibri"/>
-              <a:sym typeface="Calibri"/>
-            </a:endParaRPr>
-          </a:p>
-        </p:txBody>
-      </p:sp>
-      <p:sp>
-        <p:nvSpPr>
-          <p:cNvPr id="201" name="Google Shape;201;p7"/>
-          <p:cNvSpPr txBox="1"/>
-          <p:nvPr/>
-        </p:nvSpPr>
-        <p:spPr>
-          <a:xfrm>
-            <a:off x="822959" y="3246120"/>
-            <a:ext cx="4838400" cy="411600"/>
-          </a:xfrm>
-          <a:prstGeom prst="rect">
-            <a:avLst/>
-          </a:prstGeom>
-          <a:noFill/>
-          <a:ln>
-            <a:noFill/>
-          </a:ln>
-        </p:spPr>
-        <p:txBody>
-          <a:bodyPr anchorCtr="0" anchor="t" bIns="45700" lIns="91425" spcFirstLastPara="1" rIns="91425" wrap="square" tIns="45700">
-            <a:spAutoFit/>
-          </a:bodyPr>
-          <a:lstStyle/>
-          <a:p>
-            <a:pPr indent="0" lvl="0" marL="0" marR="0" rtl="0" algn="ctr">
-              <a:spcBef>
-                <a:spcPts val="0"/>
-              </a:spcBef>
-              <a:spcAft>
-                <a:spcPts val="0"/>
-              </a:spcAft>
-              <a:buNone/>
-            </a:pPr>
-            <a:r>
-              <a:rPr b="1" lang="en-US" sz="1900">
-                <a:solidFill>
-                  <a:srgbClr val="38BDF8"/>
-                </a:solidFill>
-                <a:latin typeface="Calibri"/>
-                <a:ea typeface="Calibri"/>
-                <a:cs typeface="Calibri"/>
-                <a:sym typeface="Calibri"/>
-              </a:rPr>
-              <a:t>Comprensión 1 a 5</a:t>
-            </a:r>
-            <a:endParaRPr/>
-          </a:p>
-        </p:txBody>
-      </p:sp>
-      <p:sp>
-        <p:nvSpPr>
-          <p:cNvPr id="202" name="Google Shape;202;p7"/>
-          <p:cNvSpPr txBox="1"/>
-          <p:nvPr/>
-        </p:nvSpPr>
-        <p:spPr>
-          <a:xfrm>
-            <a:off x="868680" y="3794759"/>
-            <a:ext cx="4747107" cy="2423160"/>
-          </a:xfrm>
-          <a:prstGeom prst="rect">
-            <a:avLst/>
-          </a:prstGeom>
-          <a:noFill/>
-          <a:ln>
-            <a:noFill/>
-          </a:ln>
-        </p:spPr>
-        <p:txBody>
-          <a:bodyPr anchorCtr="0" anchor="t" bIns="45700" lIns="91425" spcFirstLastPara="1" rIns="91425" wrap="square" tIns="45700">
-            <a:normAutofit/>
-          </a:bodyPr>
-          <a:lstStyle/>
-          <a:p>
-            <a:pPr indent="0" lvl="0" marL="0" marR="0" rtl="0" algn="ctr">
-              <a:spcBef>
-                <a:spcPts val="0"/>
-              </a:spcBef>
-              <a:spcAft>
-                <a:spcPts val="0"/>
-              </a:spcAft>
-              <a:buNone/>
-            </a:pPr>
-            <a:r>
-              <a:rPr b="0" lang="en-US" sz="2200">
-                <a:solidFill>
-                  <a:srgbClr val="FFFFFF"/>
-                </a:solidFill>
-                <a:latin typeface="Calibri"/>
-                <a:ea typeface="Calibri"/>
-                <a:cs typeface="Calibri"/>
-                <a:sym typeface="Calibri"/>
-              </a:rPr>
-              <a:t>¿Qué tan seguro/a te sientes usando </a:t>
-            </a:r>
-            <a:r>
-              <a:rPr b="0" lang="en-US" sz="2200">
-                <a:solidFill>
-                  <a:srgbClr val="4ADFCB"/>
-                </a:solidFill>
-                <a:latin typeface="Consolas"/>
-                <a:ea typeface="Consolas"/>
-                <a:cs typeface="Consolas"/>
-                <a:sym typeface="Consolas"/>
-              </a:rPr>
-              <a:t>for</a:t>
-            </a:r>
-            <a:r>
-              <a:rPr b="0" lang="en-US" sz="2200">
-                <a:solidFill>
-                  <a:srgbClr val="FFFFFF"/>
-                </a:solidFill>
-                <a:latin typeface="Calibri"/>
-                <a:ea typeface="Calibri"/>
-                <a:cs typeface="Calibri"/>
-                <a:sym typeface="Calibri"/>
-              </a:rPr>
-              <a:t> y </a:t>
-            </a:r>
-            <a:r>
-              <a:rPr b="0" lang="en-US" sz="2200">
-                <a:solidFill>
-                  <a:srgbClr val="4ADFCB"/>
-                </a:solidFill>
-                <a:latin typeface="Consolas"/>
-                <a:ea typeface="Consolas"/>
-                <a:cs typeface="Consolas"/>
-                <a:sym typeface="Consolas"/>
-              </a:rPr>
-              <a:t>range()</a:t>
-            </a:r>
-            <a:r>
-              <a:rPr b="0" lang="en-US" sz="2200">
-                <a:solidFill>
-                  <a:srgbClr val="FFFFFF"/>
-                </a:solidFill>
-                <a:latin typeface="Calibri"/>
-                <a:ea typeface="Calibri"/>
-                <a:cs typeface="Calibri"/>
-                <a:sym typeface="Calibri"/>
-              </a:rPr>
-              <a:t> para repetir tareas, donde 1 es "no entendí nada" y 5 es "puedo explicárselo a otro"?</a:t>
-            </a:r>
-            <a:endParaRPr sz="1900"/>
-          </a:p>
-        </p:txBody>
-      </p:sp>
-      <p:sp>
-        <p:nvSpPr>
-          <p:cNvPr id="203" name="Google Shape;203;p7"/>
-          <p:cNvSpPr/>
-          <p:nvPr/>
-        </p:nvSpPr>
-        <p:spPr>
-          <a:xfrm>
-            <a:off x="6255867" y="3017520"/>
-            <a:ext cx="5387187" cy="3429000"/>
-          </a:xfrm>
-          <a:prstGeom prst="rect">
-            <a:avLst/>
-          </a:prstGeom>
-          <a:solidFill>
-            <a:srgbClr val="102A1C"/>
-          </a:solidFill>
-          <a:ln>
-            <a:noFill/>
-          </a:ln>
-        </p:spPr>
-        <p:txBody>
-          <a:bodyPr anchorCtr="0" anchor="ctr" bIns="45700" lIns="91425" spcFirstLastPara="1" rIns="91425" wrap="square" tIns="45700">
-            <a:noAutofit/>
-          </a:bodyPr>
-          <a:lstStyle/>
-          <a:p>
-            <a:pPr indent="0" lvl="0" marL="0" marR="0" rtl="0" algn="ctr">
-              <a:spcBef>
-                <a:spcPts val="0"/>
-              </a:spcBef>
-              <a:spcAft>
-                <a:spcPts val="0"/>
-              </a:spcAft>
-              <a:buNone/>
-            </a:pPr>
-            <a:r>
-              <a:t/>
-            </a:r>
-            <a:endParaRPr sz="1800">
-              <a:solidFill>
-                <a:schemeClr val="lt1"/>
-              </a:solidFill>
-              <a:latin typeface="Calibri"/>
-              <a:ea typeface="Calibri"/>
-              <a:cs typeface="Calibri"/>
-              <a:sym typeface="Calibri"/>
-            </a:endParaRPr>
-          </a:p>
-        </p:txBody>
-      </p:sp>
-      <p:sp>
-        <p:nvSpPr>
-          <p:cNvPr id="204" name="Google Shape;204;p7"/>
-          <p:cNvSpPr txBox="1"/>
-          <p:nvPr/>
-        </p:nvSpPr>
-        <p:spPr>
-          <a:xfrm>
-            <a:off x="6530187" y="3246120"/>
-            <a:ext cx="4838547" cy="411480"/>
-          </a:xfrm>
-          <a:prstGeom prst="rect">
-            <a:avLst/>
-          </a:prstGeom>
-          <a:noFill/>
-          <a:ln>
-            <a:noFill/>
-          </a:ln>
-        </p:spPr>
-        <p:txBody>
-          <a:bodyPr anchorCtr="0" anchor="t" bIns="45700" lIns="91425" spcFirstLastPara="1" rIns="91425" wrap="square" tIns="45700">
-            <a:spAutoFit/>
-          </a:bodyPr>
-          <a:lstStyle/>
-          <a:p>
-            <a:pPr indent="0" lvl="0" marL="0" marR="0" rtl="0" algn="ctr">
-              <a:spcBef>
-                <a:spcPts val="0"/>
-              </a:spcBef>
-              <a:spcAft>
-                <a:spcPts val="0"/>
-              </a:spcAft>
-              <a:buNone/>
-            </a:pPr>
-            <a:r>
-              <a:rPr b="1" lang="en-US" sz="1900">
-                <a:solidFill>
-                  <a:srgbClr val="4ADE80"/>
-                </a:solidFill>
-                <a:latin typeface="Calibri"/>
-                <a:ea typeface="Calibri"/>
-                <a:cs typeface="Calibri"/>
-                <a:sym typeface="Calibri"/>
-              </a:rPr>
-              <a:t>Propósito</a:t>
-            </a:r>
-            <a:endParaRPr/>
-          </a:p>
-        </p:txBody>
-      </p:sp>
-      <p:sp>
-        <p:nvSpPr>
-          <p:cNvPr id="205" name="Google Shape;205;p7"/>
-          <p:cNvSpPr txBox="1"/>
-          <p:nvPr/>
-        </p:nvSpPr>
-        <p:spPr>
-          <a:xfrm>
-            <a:off x="6575907" y="3794759"/>
-            <a:ext cx="4747107" cy="2423160"/>
-          </a:xfrm>
-          <a:prstGeom prst="rect">
-            <a:avLst/>
-          </a:prstGeom>
-          <a:noFill/>
-          <a:ln>
-            <a:noFill/>
-          </a:ln>
-        </p:spPr>
-        <p:txBody>
-          <a:bodyPr anchorCtr="0" anchor="t" bIns="45700" lIns="91425" spcFirstLastPara="1" rIns="91425" wrap="square" tIns="45700">
-            <a:normAutofit/>
-          </a:bodyPr>
-          <a:lstStyle/>
-          <a:p>
-            <a:pPr indent="0" lvl="0" marL="0" marR="0" rtl="0" algn="ctr">
-              <a:spcBef>
-                <a:spcPts val="0"/>
-              </a:spcBef>
-              <a:spcAft>
-                <a:spcPts val="0"/>
-              </a:spcAft>
-              <a:buNone/>
-            </a:pPr>
-            <a:r>
-              <a:rPr b="0" lang="en-US" sz="2200">
-                <a:solidFill>
-                  <a:srgbClr val="FFFFFF"/>
-                </a:solidFill>
-                <a:latin typeface="Calibri"/>
-                <a:ea typeface="Calibri"/>
-                <a:cs typeface="Calibri"/>
-                <a:sym typeface="Calibri"/>
-              </a:rPr>
-              <a:t>¿En qué proceso de tu vida diaria u otro ramo el orden al organizar pasos repetidos evitaría errores?</a:t>
-            </a:r>
-            <a:endParaRPr sz="1900"/>
-          </a:p>
-        </p:txBody>
-      </p:sp>
-    </p:spTree>
-  </p:cSld>
-  <p:clrMapOvr>
-    <a:masterClrMapping/>
-  </p:clrMapOvr>
-</p:sld>
+          <a:prstDash val="solid"/>
+        </a:ln>
+      </a:lnStyleLst>
+      <a:effectStyleLst>
+        <a:effectStyle>
+          <a:effectLst>
+            <a:outerShdw blurRad="40000" dist="20000" dir="5400000" rotWithShape="0">
+              <a:srgbClr val="000000">
+                <a:alpha val="38000"/>
+              </a:srgbClr>
+            </a:outerShdw>
+          </a:effectLst>
+        </a:effectStyle>
+        <a:effectStyle>
+          <a:effectLst>
+            <a:outerShdw blurRad="40000" dist="23000" dir="5400000" rotWithShape="0">
+              <a:srgbClr val="000000">
+                <a:alpha val="35000"/>
+              </a:srgbClr>
+            </a:outerShdw>
+          </a:effectLst>
+        </a:effectStyle>
+        <a:effectStyle>
+          <a:effectLst>
+            <a:outerShdw blurRad="40000" dist="23000" dir="5400000" rotWithShape="0">
+              <a:srgbClr val="000000">
+                <a:alpha val="35000"/>
+              </a:srgbClr>
+            </a:outerShdw>
+          </a:effectLst>
+          <a:scene3d>
+            <a:camera prst="orthographicFront">
+              <a:rot lat="0" lon="0" rev="0"/>
+            </a:camera>
+            <a:lightRig rig="threePt" dir="t">
+              <a:rot lat="0" lon="0" rev="1200000"/>
+            </a:lightRig>
+          </a:scene3d>
+          <a:sp3d>
+            <a:bevelT w="63500" h="25400"/>
+          </a:sp3d>
+        </a:effectStyle>
+      </a:effectStyleLst>
+      <a:bgFillStyleLst>
+        <a:solidFill>
+          <a:schemeClr val="phClr"/>
+        </a:solidFill>
+        <a:gradFill rotWithShape="1">
+          <a:gsLst>
+            <a:gs pos="0">
+              <a:schemeClr val="phClr">
+                <a:tint val="40000"/>
+                <a:satMod val="350000"/>
+              </a:schemeClr>
+            </a:gs>
+            <a:gs pos="40000">
+              <a:schemeClr val="phClr">
+                <a:tint val="45000"/>
+                <a:shade val="99000"/>
+                <a:satMod val="350000"/>
+              </a:schemeClr>
+            </a:gs>
+            <a:gs pos="100000">
+              <a:schemeClr val="phClr">
+                <a:shade val="20000"/>
+                <a:satMod val="255000"/>
+              </a:schemeClr>
+            </a:gs>
+          </a:gsLst>
+          <a:path path="circle">
+            <a:fillToRect l="50000" t="-80000" r="50000" b="180000"/>
+          </a:path>
+        </a:gradFill>
+        <a:gradFill rotWithShape="1">
+          <a:gsLst>
+            <a:gs pos="0">
+              <a:schemeClr val="phClr">
+                <a:tint val="80000"/>
+                <a:satMod val="300000"/>
+              </a:schemeClr>
+            </a:gs>
+            <a:gs pos="100000">
+              <a:schemeClr val="phClr">
+                <a:shade val="30000"/>
+                <a:satMod val="200000"/>
+              </a:schemeClr>
+            </a:gs>
+          </a:gsLst>
+          <a:path path="circle">
+            <a:fillToRect l="50000" t="50000" r="50000" b="50000"/>
+          </a:path>
+        </a:gradFill>
+      </a:bgFillStyleLst>
+    </a:fmtScheme>
+  </a:themeElements>
+</a:theme>
 </file>
 
-<file path=ppt/theme/theme1.xml><?xml version="1.0" encoding="utf-8"?>
+<file path=ppt/theme/theme2.xml><?xml version="1.0" encoding="utf-8"?>
 <a:theme xmlns:a="http://schemas.openxmlformats.org/drawingml/2006/main" xmlns:r="http://schemas.openxmlformats.org/officeDocument/2006/relationships" name="Office Theme">
   <a:themeElements>
     <a:clrScheme name="Office">
@@ -18988,283 +20679,4 @@
     </a:fmtScheme>
   </a:themeElements>
 </a:theme>
-</file>
-
-<file path=ppt/theme/theme2.xml><?xml version="1.0" encoding="utf-8"?>
-<a:theme xmlns:a="http://schemas.openxmlformats.org/drawingml/2006/main" xmlns:r="http://schemas.openxmlformats.org/officeDocument/2006/relationships">
-  <a:themeElements>
-    <a:clrScheme name="Default">
-      <a:dk1>
-        <a:srgbClr val="000000"/>
-      </a:dk1>
-      <a:lt1>
-        <a:srgbClr val="FFFFFF"/>
-      </a:lt1>
-      <a:dk2>
-        <a:srgbClr val="158158"/>
-      </a:dk2>
-      <a:lt2>
-        <a:srgbClr val="F3F3F3"/>
-      </a:lt2>
-      <a:accent1>
-        <a:srgbClr val="058DC7"/>
-      </a:accent1>
-      <a:accent2>
-        <a:srgbClr val="50B432"/>
-      </a:accent2>
-      <a:accent3>
-        <a:srgbClr val="ED561B"/>
-      </a:accent3>
-      <a:accent4>
-        <a:srgbClr val="EDEF00"/>
-      </a:accent4>
-      <a:accent5>
-        <a:srgbClr val="24CBE5"/>
-      </a:accent5>
-      <a:accent6>
-        <a:srgbClr val="64E572"/>
-      </a:accent6>
-      <a:hlink>
-        <a:srgbClr val="2200CC"/>
-      </a:hlink>
-      <a:folHlink>
-        <a:srgbClr val="551A8B"/>
-      </a:folHlink>
-    </a:clrScheme>
-    <a:fontScheme name="Office">
-      <a:majorFont>
-        <a:latin typeface="Arial"/>
-        <a:ea typeface=""/>
-        <a:cs typeface=""/>
-        <a:font script="Jpan" typeface="ＭＳ Ｐゴシック"/>
-        <a:font script="Hang" typeface="맑은 고딕"/>
-        <a:font script="Hans" typeface="宋体"/>
-        <a:font script="Hant" typeface="新細明體"/>
-        <a:font script="Arab" typeface="Times New Roman"/>
-        <a:font script="Hebr" typeface="Times New Roman"/>
-        <a:font script="Thai" typeface="Angsana New"/>
-        <a:font script="Ethi" typeface="Nyala"/>
-        <a:font script="Beng" typeface="Vrinda"/>
-        <a:font script="Gujr" typeface="Shruti"/>
-        <a:font script="Khmr" typeface="MoolBoran"/>
-        <a:font script="Knda" typeface="Tunga"/>
-        <a:font script="Guru" typeface="Raavi"/>
-        <a:font script="Cans" typeface="Euphemia"/>
-        <a:font script="Cher" typeface="Plantagenet Cherokee"/>
-        <a:font script="Yiii" typeface="Microsoft Yi Baiti"/>
-        <a:font script="Tibt" typeface="Microsoft Himalaya"/>
-        <a:font script="Thaa" typeface="MV Boli"/>
-        <a:font script="Deva" typeface="Mangal"/>
-        <a:font script="Telu" typeface="Gautami"/>
-        <a:font script="Taml" typeface="Latha"/>
-        <a:font script="Syrc" typeface="Estrangelo Edessa"/>
-        <a:font script="Orya" typeface="Kalinga"/>
-        <a:font script="Mlym" typeface="Kartika"/>
-        <a:font script="Laoo" typeface="DokChampa"/>
-        <a:font script="Sinh" typeface="Iskoola Pota"/>
-        <a:font script="Mong" typeface="Mongolian Baiti"/>
-        <a:font script="Viet" typeface="Times New Roman"/>
-        <a:font script="Uigh" typeface="Microsoft Uighur"/>
-        <a:font script="Geor" typeface="Sylfaen"/>
-      </a:majorFont>
-      <a:minorFont>
-        <a:latin typeface="Arial"/>
-        <a:ea typeface=""/>
-        <a:cs typeface=""/>
-        <a:font script="Jpan" typeface="ＭＳ Ｐゴシック"/>
-        <a:font script="Hang" typeface="맑은 고딕"/>
-        <a:font script="Hans" typeface="宋体"/>
-        <a:font script="Hant" typeface="新細明體"/>
-        <a:font script="Arab" typeface="Arial"/>
-        <a:font script="Hebr" typeface="Arial"/>
-        <a:font script="Thai" typeface="Cordia New"/>
-        <a:font script="Ethi" typeface="Nyala"/>
-        <a:font script="Beng" typeface="Vrinda"/>
-        <a:font script="Gujr" typeface="Shruti"/>
-        <a:font script="Khmr" typeface="DaunPenh"/>
-        <a:font script="Knda" typeface="Tunga"/>
-        <a:font script="Guru" typeface="Raavi"/>
-        <a:font script="Cans" typeface="Euphemia"/>
-        <a:font script="Cher" typeface="Plantagenet Cherokee"/>
-        <a:font script="Yiii" typeface="Microsoft Yi Baiti"/>
-        <a:font script="Tibt" typeface="Microsoft Himalaya"/>
-        <a:font script="Thaa" typeface="MV Boli"/>
-        <a:font script="Deva" typeface="Mangal"/>
-        <a:font script="Telu" typeface="Gautami"/>
-        <a:font script="Taml" typeface="Latha"/>
-        <a:font script="Syrc" typeface="Estrangelo Edessa"/>
-        <a:font script="Orya" typeface="Kalinga"/>
-        <a:font script="Mlym" typeface="Kartika"/>
-        <a:font script="Laoo" typeface="DokChampa"/>
-        <a:font script="Sinh" typeface="Iskoola Pota"/>
-        <a:font script="Mong" typeface="Mongolian Baiti"/>
-        <a:font script="Viet" typeface="Arial"/>
-        <a:font script="Uigh" typeface="Microsoft Uighur"/>
-        <a:font script="Geor" typeface="Sylfaen"/>
-      </a:minorFont>
-    </a:fontScheme>
-    <a:fmtScheme name="Office">
-      <a:fillStyleLst>
-        <a:solidFill>
-          <a:schemeClr val="phClr"/>
-        </a:solidFill>
-        <a:gradFill rotWithShape="1">
-          <a:gsLst>
-            <a:gs pos="0">
-              <a:schemeClr val="phClr">
-                <a:tint val="50000"/>
-                <a:satMod val="300000"/>
-              </a:schemeClr>
-            </a:gs>
-            <a:gs pos="35000">
-              <a:schemeClr val="phClr">
-                <a:tint val="37000"/>
-                <a:satMod val="300000"/>
-              </a:schemeClr>
-            </a:gs>
-            <a:gs pos="100000">
-              <a:schemeClr val="phClr">
-                <a:tint val="15000"/>
-                <a:satMod val="350000"/>
-              </a:schemeClr>
-            </a:gs>
-          </a:gsLst>
-          <a:lin ang="16200000" scaled="1"/>
-        </a:gradFill>
-        <a:gradFill rotWithShape="1">
-          <a:gsLst>
-            <a:gs pos="0">
-              <a:schemeClr val="phClr">
-                <a:tint val="100000"/>
-                <a:shade val="100000"/>
-                <a:satMod val="130000"/>
-              </a:schemeClr>
-            </a:gs>
-            <a:gs pos="100000">
-              <a:schemeClr val="phClr">
-                <a:tint val="50000"/>
-                <a:shade val="100000"/>
-                <a:satMod val="350000"/>
-              </a:schemeClr>
-            </a:gs>
-          </a:gsLst>
-          <a:lin ang="16200000" scaled="0"/>
-        </a:gradFill>
-      </a:fillStyleLst>
-      <a:lnStyleLst>
-        <a:ln w="9525" cap="flat" cmpd="sng" algn="ctr">
-          <a:solidFill>
-            <a:schemeClr val="phClr">
-              <a:shade val="95000"/>
-              <a:satMod val="105000"/>
-            </a:schemeClr>
-          </a:solidFill>
-          <a:prstDash val="solid"/>
-        </a:ln>
-        <a:ln w="25400" cap="flat" cmpd="sng" algn="ctr">
-          <a:solidFill>
-            <a:schemeClr val="phClr"/>
-          </a:solidFill>
-          <a:prstDash val="solid"/>
-        </a:ln>
-        <a:ln w="38100" cap="flat" cmpd="sng" algn="ctr">
-          <a:solidFill>
-            <a:schemeClr val="phClr"/>
-          </a:solidFill>
-          <a:prstDash val="solid"/>
-        </a:ln>
-      </a:lnStyleLst>
-      <a:effectStyleLst>
-        <a:effectStyle>
-          <a:effectLst>
-            <a:outerShdw blurRad="40000" dist="20000" dir="5400000" rotWithShape="0">
-              <a:srgbClr val="000000">
-                <a:alpha val="38000"/>
-              </a:srgbClr>
-            </a:outerShdw>
-          </a:effectLst>
-        </a:effectStyle>
-        <a:effectStyle>
-          <a:effectLst>
-            <a:outerShdw blurRad="40000" dist="23000" dir="5400000" rotWithShape="0">
-              <a:srgbClr val="000000">
-                <a:alpha val="35000"/>
-              </a:srgbClr>
-            </a:outerShdw>
-          </a:effectLst>
-        </a:effectStyle>
-        <a:effectStyle>
-          <a:effectLst>
-            <a:outerShdw blurRad="40000" dist="23000" dir="5400000" rotWithShape="0">
-              <a:srgbClr val="000000">
-                <a:alpha val="35000"/>
-              </a:srgbClr>
-            </a:outerShdw>
-          </a:effectLst>
-          <a:scene3d>
-            <a:camera prst="orthographicFront">
-              <a:rot lat="0" lon="0" rev="0"/>
-            </a:camera>
-            <a:lightRig rig="threePt" dir="t">
-              <a:rot lat="0" lon="0" rev="1200000"/>
-            </a:lightRig>
-          </a:scene3d>
-          <a:sp3d>
-            <a:bevelT w="63500" h="25400"/>
-          </a:sp3d>
-        </a:effectStyle>
-      </a:effectStyleLst>
-      <a:bgFillStyleLst>
-        <a:solidFill>
-          <a:schemeClr val="phClr"/>
-        </a:solidFill>
-        <a:gradFill rotWithShape="1">
-          <a:gsLst>
-            <a:gs pos="0">
-              <a:schemeClr val="phClr">
-                <a:tint val="40000"/>
-                <a:satMod val="350000"/>
-              </a:schemeClr>
-            </a:gs>
-            <a:gs pos="40000">
-              <a:schemeClr val="phClr">
-                <a:tint val="45000"/>
-                <a:shade val="99000"/>
-                <a:satMod val="350000"/>
-              </a:schemeClr>
-            </a:gs>
-            <a:gs pos="100000">
-              <a:schemeClr val="phClr">
-                <a:shade val="20000"/>
-                <a:satMod val="255000"/>
-              </a:schemeClr>
-            </a:gs>
-          </a:gsLst>
-          <a:path path="circle">
-            <a:fillToRect l="50000" t="-80000" r="50000" b="180000"/>
-          </a:path>
-        </a:gradFill>
-        <a:gradFill rotWithShape="1">
-          <a:gsLst>
-            <a:gs pos="0">
-              <a:schemeClr val="phClr">
-                <a:tint val="80000"/>
-                <a:satMod val="300000"/>
-              </a:schemeClr>
-            </a:gs>
-            <a:gs pos="100000">
-              <a:schemeClr val="phClr">
-                <a:shade val="30000"/>
-                <a:satMod val="200000"/>
-              </a:schemeClr>
-            </a:gs>
-          </a:gsLst>
-          <a:path path="circle">
-            <a:fillToRect l="50000" t="50000" r="50000" b="50000"/>
-          </a:path>
-        </a:gradFill>
-      </a:bgFillStyleLst>
-    </a:fmtScheme>
-  </a:themeElements>
-</a:theme>
 </file>
--- a/clases/clase-16-for-range/Clase 16 - for + range() - Presentación.pptx
+++ b/clases/clase-16-for-range/Clase 16 - for + range() - Presentación.pptx
@@ -13590,7 +13590,7 @@
         </p:spPr>
         <p:txBody>
           <a:bodyPr anchorCtr="0" anchor="t" bIns="45700" lIns="91425" spcFirstLastPara="1" rIns="91425" wrap="square" tIns="45700">
-            <a:normAutofit fontScale="85000" lnSpcReduction="20000"/>
+            <a:normAutofit/>
           </a:bodyPr>
           <a:lstStyle/>
           <a:p>
@@ -13613,10 +13613,10 @@
                 <a:cs typeface="Calibri"/>
                 <a:sym typeface="Calibri"/>
               </a:rPr>
-              <a:t>La rigurosidad es la capacidad de trabajar con cuidado, revisar los pasos y comprobar que el resultado sea correcto. Esta habilidad es clave en cualquier proceso real que se repite muchas veces, porque un pequeño error en el inicio, el término o el salto de una secuencia puede cambiar todo el resultado. Hoy la vamos a ejercitar con</a:t>
+              <a:t>La rigurosidad es trabajar con cuidado y verificar que cada paso sea correcto, ya que pequeños errores pueden cambiar todo el resultado. Hoy la ejercitaremos usando </a:t>
             </a:r>
             <a:r>
-              <a:rPr lang="en-US" sz="2400">
+              <a:rPr lang="en-US" sz="2200">
                 <a:solidFill>
                   <a:srgbClr val="4ADFCB"/>
                 </a:solidFill>
@@ -13625,7 +13625,43 @@
                 <a:cs typeface="Consolas"/>
                 <a:sym typeface="Consolas"/>
               </a:rPr>
-              <a:t> for , range()</a:t>
+              <a:t>for</a:t>
+            </a:r>
+            <a:r>
+              <a:rPr lang="en-US" sz="2400">
+                <a:solidFill>
+                  <a:schemeClr val="lt1"/>
+                </a:solidFill>
+                <a:latin typeface="Calibri"/>
+                <a:ea typeface="Calibri"/>
+                <a:cs typeface="Calibri"/>
+                <a:sym typeface="Calibri"/>
+              </a:rPr>
+              <a:t> y </a:t>
+            </a:r>
+            <a:r>
+              <a:rPr lang="en-US" sz="2200">
+                <a:solidFill>
+                  <a:srgbClr val="4ADFCB"/>
+                </a:solidFill>
+                <a:latin typeface="Consolas"/>
+                <a:ea typeface="Consolas"/>
+                <a:cs typeface="Consolas"/>
+                <a:sym typeface="Consolas"/>
+              </a:rPr>
+              <a:t>range()</a:t>
+            </a:r>
+            <a:r>
+              <a:rPr lang="en-US" sz="2400">
+                <a:solidFill>
+                  <a:schemeClr val="lt1"/>
+                </a:solidFill>
+                <a:latin typeface="Calibri"/>
+                <a:ea typeface="Calibri"/>
+                <a:cs typeface="Calibri"/>
+                <a:sym typeface="Calibri"/>
+              </a:rPr>
+              <a:t>.</a:t>
             </a:r>
             <a:endParaRPr sz="2400">
               <a:solidFill>
@@ -14978,7 +15014,7 @@
             <a:tbl>
               <a:tblPr bandRow="1" firstRow="1">
                 <a:noFill/>
-                <a:tableStyleId>{1EE275E9-B3DF-4A07-940A-6F7083ACD9C3}</a:tableStyleId>
+                <a:tableStyleId>{35C0A791-112F-4430-9A13-FB05382DC230}</a:tableStyleId>
               </a:tblPr>
               <a:tblGrid>
                 <a:gridCol w="5547200"/>
@@ -15650,7 +15686,7 @@
             <a:tbl>
               <a:tblPr bandRow="1" firstRow="1">
                 <a:noFill/>
-                <a:tableStyleId>{1EE275E9-B3DF-4A07-940A-6F7083ACD9C3}</a:tableStyleId>
+                <a:tableStyleId>{35C0A791-112F-4430-9A13-FB05382DC230}</a:tableStyleId>
               </a:tblPr>
               <a:tblGrid>
                 <a:gridCol w="5547200"/>
@@ -16478,7 +16514,7 @@
             <a:tbl>
               <a:tblPr bandRow="1" firstRow="1">
                 <a:noFill/>
-                <a:tableStyleId>{1EE275E9-B3DF-4A07-940A-6F7083ACD9C3}</a:tableStyleId>
+                <a:tableStyleId>{35C0A791-112F-4430-9A13-FB05382DC230}</a:tableStyleId>
               </a:tblPr>
               <a:tblGrid>
                 <a:gridCol w="5547200"/>
@@ -19404,7 +19440,7 @@
             <a:tbl>
               <a:tblPr bandRow="1" firstRow="1">
                 <a:noFill/>
-                <a:tableStyleId>{1EE275E9-B3DF-4A07-940A-6F7083ACD9C3}</a:tableStyleId>
+                <a:tableStyleId>{35C0A791-112F-4430-9A13-FB05382DC230}</a:tableStyleId>
               </a:tblPr>
               <a:tblGrid>
                 <a:gridCol w="3200400"/>
@@ -20124,6 +20160,285 @@
 </file>
 
 <file path=ppt/theme/theme1.xml><?xml version="1.0" encoding="utf-8"?>
+<a:theme xmlns:a="http://schemas.openxmlformats.org/drawingml/2006/main" xmlns:r="http://schemas.openxmlformats.org/officeDocument/2006/relationships" name="Office Theme">
+  <a:themeElements>
+    <a:clrScheme name="Office">
+      <a:dk1>
+        <a:srgbClr val="000000"/>
+      </a:dk1>
+      <a:lt1>
+        <a:srgbClr val="FFFFFF"/>
+      </a:lt1>
+      <a:dk2>
+        <a:srgbClr val="1F497D"/>
+      </a:dk2>
+      <a:lt2>
+        <a:srgbClr val="EEECE1"/>
+      </a:lt2>
+      <a:accent1>
+        <a:srgbClr val="4F81BD"/>
+      </a:accent1>
+      <a:accent2>
+        <a:srgbClr val="C0504D"/>
+      </a:accent2>
+      <a:accent3>
+        <a:srgbClr val="9BBB59"/>
+      </a:accent3>
+      <a:accent4>
+        <a:srgbClr val="8064A2"/>
+      </a:accent4>
+      <a:accent5>
+        <a:srgbClr val="4BACC6"/>
+      </a:accent5>
+      <a:accent6>
+        <a:srgbClr val="F79646"/>
+      </a:accent6>
+      <a:hlink>
+        <a:srgbClr val="0000FF"/>
+      </a:hlink>
+      <a:folHlink>
+        <a:srgbClr val="800080"/>
+      </a:folHlink>
+    </a:clrScheme>
+    <a:fontScheme name="Office">
+      <a:majorFont>
+        <a:latin typeface="Arial"/>
+        <a:ea typeface=""/>
+        <a:cs typeface=""/>
+        <a:font script="Jpan" typeface="ＭＳ Ｐゴシック"/>
+        <a:font script="Hang" typeface="맑은 고딕"/>
+        <a:font script="Hans" typeface="宋体"/>
+        <a:font script="Hant" typeface="新細明體"/>
+        <a:font script="Arab" typeface="Times New Roman"/>
+        <a:font script="Hebr" typeface="Times New Roman"/>
+        <a:font script="Thai" typeface="Angsana New"/>
+        <a:font script="Ethi" typeface="Nyala"/>
+        <a:font script="Beng" typeface="Vrinda"/>
+        <a:font script="Gujr" typeface="Shruti"/>
+        <a:font script="Khmr" typeface="MoolBoran"/>
+        <a:font script="Knda" typeface="Tunga"/>
+        <a:font script="Guru" typeface="Raavi"/>
+        <a:font script="Cans" typeface="Euphemia"/>
+        <a:font script="Cher" typeface="Plantagenet Cherokee"/>
+        <a:font script="Yiii" typeface="Microsoft Yi Baiti"/>
+        <a:font script="Tibt" typeface="Microsoft Himalaya"/>
+        <a:font script="Thaa" typeface="MV Boli"/>
+        <a:font script="Deva" typeface="Mangal"/>
+        <a:font script="Telu" typeface="Gautami"/>
+        <a:font script="Taml" typeface="Latha"/>
+        <a:font script="Syrc" typeface="Estrangelo Edessa"/>
+        <a:font script="Orya" typeface="Kalinga"/>
+        <a:font script="Mlym" typeface="Kartika"/>
+        <a:font script="Laoo" typeface="DokChampa"/>
+        <a:font script="Sinh" typeface="Iskoola Pota"/>
+        <a:font script="Mong" typeface="Mongolian Baiti"/>
+        <a:font script="Viet" typeface="Times New Roman"/>
+        <a:font script="Uigh" typeface="Microsoft Uighur"/>
+        <a:font script="Geor" typeface="Sylfaen"/>
+      </a:majorFont>
+      <a:minorFont>
+        <a:latin typeface="Arial"/>
+        <a:ea typeface=""/>
+        <a:cs typeface=""/>
+        <a:font script="Jpan" typeface="ＭＳ Ｐゴシック"/>
+        <a:font script="Hang" typeface="맑은 고딕"/>
+        <a:font script="Hans" typeface="宋体"/>
+        <a:font script="Hant" typeface="新細明體"/>
+        <a:font script="Arab" typeface="Arial"/>
+        <a:font script="Hebr" typeface="Arial"/>
+        <a:font script="Thai" typeface="Cordia New"/>
+        <a:font script="Ethi" typeface="Nyala"/>
+        <a:font script="Beng" typeface="Vrinda"/>
+        <a:font script="Gujr" typeface="Shruti"/>
+        <a:font script="Khmr" typeface="DaunPenh"/>
+        <a:font script="Knda" typeface="Tunga"/>
+        <a:font script="Guru" typeface="Raavi"/>
+        <a:font script="Cans" typeface="Euphemia"/>
+        <a:font script="Cher" typeface="Plantagenet Cherokee"/>
+        <a:font script="Yiii" typeface="Microsoft Yi Baiti"/>
+        <a:font script="Tibt" typeface="Microsoft Himalaya"/>
+        <a:font script="Thaa" typeface="MV Boli"/>
+        <a:font script="Deva" typeface="Mangal"/>
+        <a:font script="Telu" typeface="Gautami"/>
+        <a:font script="Taml" typeface="Latha"/>
+        <a:font script="Syrc" typeface="Estrangelo Edessa"/>
+        <a:font script="Orya" typeface="Kalinga"/>
+        <a:font script="Mlym" typeface="Kartika"/>
+        <a:font script="Laoo" typeface="DokChampa"/>
+        <a:font script="Sinh" typeface="Iskoola Pota"/>
+        <a:font script="Mong" typeface="Mongolian Baiti"/>
+        <a:font script="Viet" typeface="Arial"/>
+        <a:font script="Uigh" typeface="Microsoft Uighur"/>
+        <a:font script="Geor" typeface="Sylfaen"/>
+      </a:minorFont>
+    </a:fontScheme>
+    <a:fmtScheme name="Office">
+      <a:fillStyleLst>
+        <a:solidFill>
+          <a:schemeClr val="phClr"/>
+        </a:solidFill>
+        <a:gradFill rotWithShape="1">
+          <a:gsLst>
+            <a:gs pos="0">
+              <a:schemeClr val="phClr">
+                <a:tint val="50000"/>
+                <a:satMod val="300000"/>
+              </a:schemeClr>
+            </a:gs>
+            <a:gs pos="35000">
+              <a:schemeClr val="phClr">
+                <a:tint val="37000"/>
+                <a:satMod val="300000"/>
+              </a:schemeClr>
+            </a:gs>
+            <a:gs pos="100000">
+              <a:schemeClr val="phClr">
+                <a:tint val="15000"/>
+                <a:satMod val="350000"/>
+              </a:schemeClr>
+            </a:gs>
+          </a:gsLst>
+          <a:lin ang="16200000" scaled="1"/>
+        </a:gradFill>
+        <a:gradFill rotWithShape="1">
+          <a:gsLst>
+            <a:gs pos="0">
+              <a:schemeClr val="phClr">
+                <a:tint val="100000"/>
+                <a:shade val="100000"/>
+                <a:satMod val="130000"/>
+              </a:schemeClr>
+            </a:gs>
+            <a:gs pos="100000">
+              <a:schemeClr val="phClr">
+                <a:tint val="50000"/>
+                <a:shade val="100000"/>
+                <a:satMod val="350000"/>
+              </a:schemeClr>
+            </a:gs>
+          </a:gsLst>
+          <a:lin ang="16200000" scaled="0"/>
+        </a:gradFill>
+      </a:fillStyleLst>
+      <a:lnStyleLst>
+        <a:ln w="9525" cap="flat" cmpd="sng" algn="ctr">
+          <a:solidFill>
+            <a:schemeClr val="phClr">
+              <a:shade val="95000"/>
+              <a:satMod val="105000"/>
+            </a:schemeClr>
+          </a:solidFill>
+          <a:prstDash val="solid"/>
+        </a:ln>
+        <a:ln w="25400" cap="flat" cmpd="sng" algn="ctr">
+          <a:solidFill>
+            <a:schemeClr val="phClr"/>
+          </a:solidFill>
+          <a:prstDash val="solid"/>
+        </a:ln>
+        <a:ln w="38100" cap="flat" cmpd="sng" algn="ctr">
+          <a:solidFill>
+            <a:schemeClr val="phClr"/>
+          </a:solidFill>
+          <a:prstDash val="solid"/>
+        </a:ln>
+      </a:lnStyleLst>
+      <a:effectStyleLst>
+        <a:effectStyle>
+          <a:effectLst>
+            <a:outerShdw blurRad="40000" dist="20000" dir="5400000" rotWithShape="0">
+              <a:srgbClr val="000000">
+                <a:alpha val="38000"/>
+              </a:srgbClr>
+            </a:outerShdw>
+          </a:effectLst>
+        </a:effectStyle>
+        <a:effectStyle>
+          <a:effectLst>
+            <a:outerShdw blurRad="40000" dist="23000" dir="5400000" rotWithShape="0">
+              <a:srgbClr val="000000">
+                <a:alpha val="35000"/>
+              </a:srgbClr>
+            </a:outerShdw>
+          </a:effectLst>
+        </a:effectStyle>
+        <a:effectStyle>
+          <a:effectLst>
+            <a:outerShdw blurRad="40000" dist="23000" dir="5400000" rotWithShape="0">
+              <a:srgbClr val="000000">
+                <a:alpha val="35000"/>
+              </a:srgbClr>
+            </a:outerShdw>
+          </a:effectLst>
+          <a:scene3d>
+            <a:camera prst="orthographicFront">
+              <a:rot lat="0" lon="0" rev="0"/>
+            </a:camera>
+            <a:lightRig rig="threePt" dir="t">
+              <a:rot lat="0" lon="0" rev="1200000"/>
+            </a:lightRig>
+          </a:scene3d>
+          <a:sp3d>
+            <a:bevelT w="63500" h="25400"/>
+          </a:sp3d>
+        </a:effectStyle>
+      </a:effectStyleLst>
+      <a:bgFillStyleLst>
+        <a:solidFill>
+          <a:schemeClr val="phClr"/>
+        </a:solidFill>
+        <a:gradFill rotWithShape="1">
+          <a:gsLst>
+            <a:gs pos="0">
+              <a:schemeClr val="phClr">
+                <a:tint val="40000"/>
+                <a:satMod val="350000"/>
+              </a:schemeClr>
+            </a:gs>
+            <a:gs pos="40000">
+              <a:schemeClr val="phClr">
+                <a:tint val="45000"/>
+                <a:shade val="99000"/>
+                <a:satMod val="350000"/>
+              </a:schemeClr>
+            </a:gs>
+            <a:gs pos="100000">
+              <a:schemeClr val="phClr">
+                <a:shade val="20000"/>
+                <a:satMod val="255000"/>
+              </a:schemeClr>
+            </a:gs>
+          </a:gsLst>
+          <a:path path="circle">
+            <a:fillToRect l="50000" t="-80000" r="50000" b="180000"/>
+          </a:path>
+        </a:gradFill>
+        <a:gradFill rotWithShape="1">
+          <a:gsLst>
+            <a:gs pos="0">
+              <a:schemeClr val="phClr">
+                <a:tint val="80000"/>
+                <a:satMod val="300000"/>
+              </a:schemeClr>
+            </a:gs>
+            <a:gs pos="100000">
+              <a:schemeClr val="phClr">
+                <a:shade val="30000"/>
+                <a:satMod val="200000"/>
+              </a:schemeClr>
+            </a:gs>
+          </a:gsLst>
+          <a:path path="circle">
+            <a:fillToRect l="50000" t="50000" r="50000" b="50000"/>
+          </a:path>
+        </a:gradFill>
+      </a:bgFillStyleLst>
+    </a:fmtScheme>
+  </a:themeElements>
+</a:theme>
+</file>
+
+<file path=ppt/theme/theme2.xml><?xml version="1.0" encoding="utf-8"?>
 <a:theme xmlns:a="http://schemas.openxmlformats.org/drawingml/2006/main" xmlns:r="http://schemas.openxmlformats.org/officeDocument/2006/relationships">
   <a:themeElements>
     <a:clrScheme name="Default">
@@ -20400,283 +20715,4 @@
     </a:fmtScheme>
   </a:themeElements>
 </a:theme>
-</file>
-
-<file path=ppt/theme/theme2.xml><?xml version="1.0" encoding="utf-8"?>
-<a:theme xmlns:a="http://schemas.openxmlformats.org/drawingml/2006/main" xmlns:r="http://schemas.openxmlformats.org/officeDocument/2006/relationships" name="Office Theme">
-  <a:themeElements>
-    <a:clrScheme name="Office">
-      <a:dk1>
-        <a:srgbClr val="000000"/>
-      </a:dk1>
-      <a:lt1>
-        <a:srgbClr val="FFFFFF"/>
-      </a:lt1>
-      <a:dk2>
-        <a:srgbClr val="1F497D"/>
-      </a:dk2>
-      <a:lt2>
-        <a:srgbClr val="EEECE1"/>
-      </a:lt2>
-      <a:accent1>
-        <a:srgbClr val="4F81BD"/>
-      </a:accent1>
-      <a:accent2>
-        <a:srgbClr val="C0504D"/>
-      </a:accent2>
-      <a:accent3>
-        <a:srgbClr val="9BBB59"/>
-      </a:accent3>
-      <a:accent4>
-        <a:srgbClr val="8064A2"/>
-      </a:accent4>
-      <a:accent5>
-        <a:srgbClr val="4BACC6"/>
-      </a:accent5>
-      <a:accent6>
-        <a:srgbClr val="F79646"/>
-      </a:accent6>
-      <a:hlink>
-        <a:srgbClr val="0000FF"/>
-      </a:hlink>
-      <a:folHlink>
-        <a:srgbClr val="800080"/>
-      </a:folHlink>
-    </a:clrScheme>
-    <a:fontScheme name="Office">
-      <a:majorFont>
-        <a:latin typeface="Arial"/>
-        <a:ea typeface=""/>
-        <a:cs typeface=""/>
-        <a:font script="Jpan" typeface="ＭＳ Ｐゴシック"/>
-        <a:font script="Hang" typeface="맑은 고딕"/>
-        <a:font script="Hans" typeface="宋体"/>
-        <a:font script="Hant" typeface="新細明體"/>
-        <a:font script="Arab" typeface="Times New Roman"/>
-        <a:font script="Hebr" typeface="Times New Roman"/>
-        <a:font script="Thai" typeface="Angsana New"/>
-        <a:font script="Ethi" typeface="Nyala"/>
-        <a:font script="Beng" typeface="Vrinda"/>
-        <a:font script="Gujr" typeface="Shruti"/>
-        <a:font script="Khmr" typeface="MoolBoran"/>
-        <a:font script="Knda" typeface="Tunga"/>
-        <a:font script="Guru" typeface="Raavi"/>
-        <a:font script="Cans" typeface="Euphemia"/>
-        <a:font script="Cher" typeface="Plantagenet Cherokee"/>
-        <a:font script="Yiii" typeface="Microsoft Yi Baiti"/>
-        <a:font script="Tibt" typeface="Microsoft Himalaya"/>
-        <a:font script="Thaa" typeface="MV Boli"/>
-        <a:font script="Deva" typeface="Mangal"/>
-        <a:font script="Telu" typeface="Gautami"/>
-        <a:font script="Taml" typeface="Latha"/>
-        <a:font script="Syrc" typeface="Estrangelo Edessa"/>
-        <a:font script="Orya" typeface="Kalinga"/>
-        <a:font script="Mlym" typeface="Kartika"/>
-        <a:font script="Laoo" typeface="DokChampa"/>
-        <a:font script="Sinh" typeface="Iskoola Pota"/>
-        <a:font script="Mong" typeface="Mongolian Baiti"/>
-        <a:font script="Viet" typeface="Times New Roman"/>
-        <a:font script="Uigh" typeface="Microsoft Uighur"/>
-        <a:font script="Geor" typeface="Sylfaen"/>
-      </a:majorFont>
-      <a:minorFont>
-        <a:latin typeface="Arial"/>
-        <a:ea typeface=""/>
-        <a:cs typeface=""/>
-        <a:font script="Jpan" typeface="ＭＳ Ｐゴシック"/>
-        <a:font script="Hang" typeface="맑은 고딕"/>
-        <a:font script="Hans" typeface="宋体"/>
-        <a:font script="Hant" typeface="新細明體"/>
-        <a:font script="Arab" typeface="Arial"/>
-        <a:font script="Hebr" typeface="Arial"/>
-        <a:font script="Thai" typeface="Cordia New"/>
-        <a:font script="Ethi" typeface="Nyala"/>
-        <a:font script="Beng" typeface="Vrinda"/>
-        <a:font script="Gujr" typeface="Shruti"/>
-        <a:font script="Khmr" typeface="DaunPenh"/>
-        <a:font script="Knda" typeface="Tunga"/>
-        <a:font script="Guru" typeface="Raavi"/>
-        <a:font script="Cans" typeface="Euphemia"/>
-        <a:font script="Cher" typeface="Plantagenet Cherokee"/>
-        <a:font script="Yiii" typeface="Microsoft Yi Baiti"/>
-        <a:font script="Tibt" typeface="Microsoft Himalaya"/>
-        <a:font script="Thaa" typeface="MV Boli"/>
-        <a:font script="Deva" typeface="Mangal"/>
-        <a:font script="Telu" typeface="Gautami"/>
-        <a:font script="Taml" typeface="Latha"/>
-        <a:font script="Syrc" typeface="Estrangelo Edessa"/>
-        <a:font script="Orya" typeface="Kalinga"/>
-        <a:font script="Mlym" typeface="Kartika"/>
-        <a:font script="Laoo" typeface="DokChampa"/>
-        <a:font script="Sinh" typeface="Iskoola Pota"/>
-        <a:font script="Mong" typeface="Mongolian Baiti"/>
-        <a:font script="Viet" typeface="Arial"/>
-        <a:font script="Uigh" typeface="Microsoft Uighur"/>
-        <a:font script="Geor" typeface="Sylfaen"/>
-      </a:minorFont>
-    </a:fontScheme>
-    <a:fmtScheme name="Office">
-      <a:fillStyleLst>
-        <a:solidFill>
-          <a:schemeClr val="phClr"/>
-        </a:solidFill>
-        <a:gradFill rotWithShape="1">
-          <a:gsLst>
-            <a:gs pos="0">
-              <a:schemeClr val="phClr">
-                <a:tint val="50000"/>
-                <a:satMod val="300000"/>
-              </a:schemeClr>
-            </a:gs>
-            <a:gs pos="35000">
-              <a:schemeClr val="phClr">
-                <a:tint val="37000"/>
-                <a:satMod val="300000"/>
-              </a:schemeClr>
-            </a:gs>
-            <a:gs pos="100000">
-              <a:schemeClr val="phClr">
-                <a:tint val="15000"/>
-                <a:satMod val="350000"/>
-              </a:schemeClr>
-            </a:gs>
-          </a:gsLst>
-          <a:lin ang="16200000" scaled="1"/>
-        </a:gradFill>
-        <a:gradFill rotWithShape="1">
-          <a:gsLst>
-            <a:gs pos="0">
-              <a:schemeClr val="phClr">
-                <a:tint val="100000"/>
-                <a:shade val="100000"/>
-                <a:satMod val="130000"/>
-              </a:schemeClr>
-            </a:gs>
-            <a:gs pos="100000">
-              <a:schemeClr val="phClr">
-                <a:tint val="50000"/>
-                <a:shade val="100000"/>
-                <a:satMod val="350000"/>
-              </a:schemeClr>
-            </a:gs>
-          </a:gsLst>
-          <a:lin ang="16200000" scaled="0"/>
-        </a:gradFill>
-      </a:fillStyleLst>
-      <a:lnStyleLst>
-        <a:ln w="9525" cap="flat" cmpd="sng" algn="ctr">
-          <a:solidFill>
-            <a:schemeClr val="phClr">
-              <a:shade val="95000"/>
-              <a:satMod val="105000"/>
-            </a:schemeClr>
-          </a:solidFill>
-          <a:prstDash val="solid"/>
-        </a:ln>
-        <a:ln w="25400" cap="flat" cmpd="sng" algn="ctr">
-          <a:solidFill>
-            <a:schemeClr val="phClr"/>
-          </a:solidFill>
-          <a:prstDash val="solid"/>
-        </a:ln>
-        <a:ln w="38100" cap="flat" cmpd="sng" algn="ctr">
-          <a:solidFill>
-            <a:schemeClr val="phClr"/>
-          </a:solidFill>
-          <a:prstDash val="solid"/>
-        </a:ln>
-      </a:lnStyleLst>
-      <a:effectStyleLst>
-        <a:effectStyle>
-          <a:effectLst>
-            <a:outerShdw blurRad="40000" dist="20000" dir="5400000" rotWithShape="0">
-              <a:srgbClr val="000000">
-                <a:alpha val="38000"/>
-              </a:srgbClr>
-            </a:outerShdw>
-          </a:effectLst>
-        </a:effectStyle>
-        <a:effectStyle>
-          <a:effectLst>
-            <a:outerShdw blurRad="40000" dist="23000" dir="5400000" rotWithShape="0">
-              <a:srgbClr val="000000">
-                <a:alpha val="35000"/>
-              </a:srgbClr>
-            </a:outerShdw>
-          </a:effectLst>
-        </a:effectStyle>
-        <a:effectStyle>
-          <a:effectLst>
-            <a:outerShdw blurRad="40000" dist="23000" dir="5400000" rotWithShape="0">
-              <a:srgbClr val="000000">
-                <a:alpha val="35000"/>
-              </a:srgbClr>
-            </a:outerShdw>
-          </a:effectLst>
-          <a:scene3d>
-            <a:camera prst="orthographicFront">
-              <a:rot lat="0" lon="0" rev="0"/>
-            </a:camera>
-            <a:lightRig rig="threePt" dir="t">
-              <a:rot lat="0" lon="0" rev="1200000"/>
-            </a:lightRig>
-          </a:scene3d>
-          <a:sp3d>
-            <a:bevelT w="63500" h="25400"/>
-          </a:sp3d>
-        </a:effectStyle>
-      </a:effectStyleLst>
-      <a:bgFillStyleLst>
-        <a:solidFill>
-          <a:schemeClr val="phClr"/>
-        </a:solidFill>
-        <a:gradFill rotWithShape="1">
-          <a:gsLst>
-            <a:gs pos="0">
-              <a:schemeClr val="phClr">
-                <a:tint val="40000"/>
-                <a:satMod val="350000"/>
-              </a:schemeClr>
-            </a:gs>
-            <a:gs pos="40000">
-              <a:schemeClr val="phClr">
-                <a:tint val="45000"/>
-                <a:shade val="99000"/>
-                <a:satMod val="350000"/>
-              </a:schemeClr>
-            </a:gs>
-            <a:gs pos="100000">
-              <a:schemeClr val="phClr">
-                <a:shade val="20000"/>
-                <a:satMod val="255000"/>
-              </a:schemeClr>
-            </a:gs>
-          </a:gsLst>
-          <a:path path="circle">
-            <a:fillToRect l="50000" t="-80000" r="50000" b="180000"/>
-          </a:path>
-        </a:gradFill>
-        <a:gradFill rotWithShape="1">
-          <a:gsLst>
-            <a:gs pos="0">
-              <a:schemeClr val="phClr">
-                <a:tint val="80000"/>
-                <a:satMod val="300000"/>
-              </a:schemeClr>
-            </a:gs>
-            <a:gs pos="100000">
-              <a:schemeClr val="phClr">
-                <a:shade val="30000"/>
-                <a:satMod val="200000"/>
-              </a:schemeClr>
-            </a:gs>
-          </a:gsLst>
-          <a:path path="circle">
-            <a:fillToRect l="50000" t="50000" r="50000" b="50000"/>
-          </a:path>
-        </a:gradFill>
-      </a:bgFillStyleLst>
-    </a:fmtScheme>
-  </a:themeElements>
-</a:theme>
 </file>